--- a/plugins/gradient-cio/assets/examples/gradient-portfolio-attribution-compare-three-lane.pptx
+++ b/plugins/gradient-cio/assets/examples/gradient-portfolio-attribution-compare-three-lane.pptx
@@ -428,6 +428,81 @@
               </a:solidFill>
             </c:spPr>
           </c:dPt>
+          <c:dLbls>
+            <c:dLbl>
+              <c:idx val="0"/>
+              <c:tx>
+                <c:rich>
+                  <a:bodyPr/>
+                  <a:lstStyle/>
+                  <a:p>
+                    <a:r>
+                      <a:rPr lang="en-US" sz="800"/>
+                      <a:t>+0.2pp</a:t>
+                    </a:r>
+                  </a:p>
+                </c:rich>
+              </c:tx>
+              <c:dLblPos val="outEnd"/>
+              <c:showLegendKey val="0"/>
+              <c:showVal val="0"/>
+              <c:showCatName val="0"/>
+              <c:showSerName val="0"/>
+              <c:showPercent val="0"/>
+              <c:showBubbleSize val="0"/>
+            </c:dLbl>
+            <c:dLbl>
+              <c:idx val="1"/>
+              <c:tx>
+                <c:rich>
+                  <a:bodyPr/>
+                  <a:lstStyle/>
+                  <a:p>
+                    <a:r>
+                      <a:rPr lang="en-US" sz="800"/>
+                      <a:t>-0.8pp</a:t>
+                    </a:r>
+                  </a:p>
+                </c:rich>
+              </c:tx>
+              <c:dLblPos val="outEnd"/>
+              <c:showLegendKey val="0"/>
+              <c:showVal val="0"/>
+              <c:showCatName val="0"/>
+              <c:showSerName val="0"/>
+              <c:showPercent val="0"/>
+              <c:showBubbleSize val="0"/>
+            </c:dLbl>
+            <c:dLbl>
+              <c:idx val="2"/>
+              <c:tx>
+                <c:rich>
+                  <a:bodyPr/>
+                  <a:lstStyle/>
+                  <a:p>
+                    <a:r>
+                      <a:rPr lang="en-US" sz="800"/>
+                      <a:t>0.0pp</a:t>
+                    </a:r>
+                  </a:p>
+                </c:rich>
+              </c:tx>
+              <c:dLblPos val="outEnd"/>
+              <c:showLegendKey val="0"/>
+              <c:showVal val="0"/>
+              <c:showCatName val="0"/>
+              <c:showSerName val="0"/>
+              <c:showPercent val="0"/>
+              <c:showBubbleSize val="0"/>
+            </c:dLbl>
+            <c:dLblPos val="outEnd"/>
+            <c:showLegendKey val="0"/>
+            <c:showVal val="0"/>
+            <c:showCatName val="0"/>
+            <c:showSerName val="0"/>
+            <c:showPercent val="0"/>
+            <c:showBubbleSize val="0"/>
+          </c:dLbls>
           <c:cat>
             <c:strRef>
               <c:f>Sheet1!$A$2:$A$4</c:f>
@@ -605,6 +680,81 @@
               </a:solidFill>
             </c:spPr>
           </c:dPt>
+          <c:dLbls>
+            <c:dLbl>
+              <c:idx val="0"/>
+              <c:tx>
+                <c:rich>
+                  <a:bodyPr/>
+                  <a:lstStyle/>
+                  <a:p>
+                    <a:r>
+                      <a:rPr lang="en-US" sz="800"/>
+                      <a:t>+0.4pp</a:t>
+                    </a:r>
+                  </a:p>
+                </c:rich>
+              </c:tx>
+              <c:dLblPos val="outEnd"/>
+              <c:showLegendKey val="0"/>
+              <c:showVal val="0"/>
+              <c:showCatName val="0"/>
+              <c:showSerName val="0"/>
+              <c:showPercent val="0"/>
+              <c:showBubbleSize val="0"/>
+            </c:dLbl>
+            <c:dLbl>
+              <c:idx val="1"/>
+              <c:tx>
+                <c:rich>
+                  <a:bodyPr/>
+                  <a:lstStyle/>
+                  <a:p>
+                    <a:r>
+                      <a:rPr lang="en-US" sz="800"/>
+                      <a:t>-0.1pp</a:t>
+                    </a:r>
+                  </a:p>
+                </c:rich>
+              </c:tx>
+              <c:dLblPos val="outEnd"/>
+              <c:showLegendKey val="0"/>
+              <c:showVal val="0"/>
+              <c:showCatName val="0"/>
+              <c:showSerName val="0"/>
+              <c:showPercent val="0"/>
+              <c:showBubbleSize val="0"/>
+            </c:dLbl>
+            <c:dLbl>
+              <c:idx val="2"/>
+              <c:tx>
+                <c:rich>
+                  <a:bodyPr/>
+                  <a:lstStyle/>
+                  <a:p>
+                    <a:r>
+                      <a:rPr lang="en-US" sz="800"/>
+                      <a:t>+0.05pp</a:t>
+                    </a:r>
+                  </a:p>
+                </c:rich>
+              </c:tx>
+              <c:dLblPos val="outEnd"/>
+              <c:showLegendKey val="0"/>
+              <c:showVal val="0"/>
+              <c:showCatName val="0"/>
+              <c:showSerName val="0"/>
+              <c:showPercent val="0"/>
+              <c:showBubbleSize val="0"/>
+            </c:dLbl>
+            <c:dLblPos val="outEnd"/>
+            <c:showLegendKey val="0"/>
+            <c:showVal val="0"/>
+            <c:showCatName val="0"/>
+            <c:showSerName val="0"/>
+            <c:showPercent val="0"/>
+            <c:showBubbleSize val="0"/>
+          </c:dLbls>
           <c:cat>
             <c:strRef>
               <c:f>Sheet1!$A$2:$A$4</c:f>
@@ -782,6 +932,81 @@
               </a:solidFill>
             </c:spPr>
           </c:dPt>
+          <c:dLbls>
+            <c:dLbl>
+              <c:idx val="0"/>
+              <c:tx>
+                <c:rich>
+                  <a:bodyPr/>
+                  <a:lstStyle/>
+                  <a:p>
+                    <a:r>
+                      <a:rPr lang="en-US" sz="800"/>
+                      <a:t>+0.2pp</a:t>
+                    </a:r>
+                  </a:p>
+                </c:rich>
+              </c:tx>
+              <c:dLblPos val="outEnd"/>
+              <c:showLegendKey val="0"/>
+              <c:showVal val="0"/>
+              <c:showCatName val="0"/>
+              <c:showSerName val="0"/>
+              <c:showPercent val="0"/>
+              <c:showBubbleSize val="0"/>
+            </c:dLbl>
+            <c:dLbl>
+              <c:idx val="1"/>
+              <c:tx>
+                <c:rich>
+                  <a:bodyPr/>
+                  <a:lstStyle/>
+                  <a:p>
+                    <a:r>
+                      <a:rPr lang="en-US" sz="800"/>
+                      <a:t>+0.7pp</a:t>
+                    </a:r>
+                  </a:p>
+                </c:rich>
+              </c:tx>
+              <c:dLblPos val="outEnd"/>
+              <c:showLegendKey val="0"/>
+              <c:showVal val="0"/>
+              <c:showCatName val="0"/>
+              <c:showSerName val="0"/>
+              <c:showPercent val="0"/>
+              <c:showBubbleSize val="0"/>
+            </c:dLbl>
+            <c:dLbl>
+              <c:idx val="2"/>
+              <c:tx>
+                <c:rich>
+                  <a:bodyPr/>
+                  <a:lstStyle/>
+                  <a:p>
+                    <a:r>
+                      <a:rPr lang="en-US" sz="800"/>
+                      <a:t>-0.1pp</a:t>
+                    </a:r>
+                  </a:p>
+                </c:rich>
+              </c:tx>
+              <c:dLblPos val="outEnd"/>
+              <c:showLegendKey val="0"/>
+              <c:showVal val="0"/>
+              <c:showCatName val="0"/>
+              <c:showSerName val="0"/>
+              <c:showPercent val="0"/>
+              <c:showBubbleSize val="0"/>
+            </c:dLbl>
+            <c:dLblPos val="outEnd"/>
+            <c:showLegendKey val="0"/>
+            <c:showVal val="0"/>
+            <c:showCatName val="0"/>
+            <c:showSerName val="0"/>
+            <c:showPercent val="0"/>
+            <c:showBubbleSize val="0"/>
+          </c:dLbls>
           <c:cat>
             <c:strRef>
               <c:f>Sheet1!$A$2:$A$4</c:f>
@@ -959,6 +1184,81 @@
               </a:solidFill>
             </c:spPr>
           </c:dPt>
+          <c:dLbls>
+            <c:dLbl>
+              <c:idx val="0"/>
+              <c:tx>
+                <c:rich>
+                  <a:bodyPr/>
+                  <a:lstStyle/>
+                  <a:p>
+                    <a:r>
+                      <a:rPr lang="en-US" sz="800"/>
+                      <a:t>0.74</a:t>
+                    </a:r>
+                  </a:p>
+                </c:rich>
+              </c:tx>
+              <c:dLblPos val="outEnd"/>
+              <c:showLegendKey val="0"/>
+              <c:showVal val="0"/>
+              <c:showCatName val="0"/>
+              <c:showSerName val="0"/>
+              <c:showPercent val="0"/>
+              <c:showBubbleSize val="0"/>
+            </c:dLbl>
+            <c:dLbl>
+              <c:idx val="1"/>
+              <c:tx>
+                <c:rich>
+                  <a:bodyPr/>
+                  <a:lstStyle/>
+                  <a:p>
+                    <a:r>
+                      <a:rPr lang="en-US" sz="800"/>
+                      <a:t>0.62</a:t>
+                    </a:r>
+                  </a:p>
+                </c:rich>
+              </c:tx>
+              <c:dLblPos val="outEnd"/>
+              <c:showLegendKey val="0"/>
+              <c:showVal val="0"/>
+              <c:showCatName val="0"/>
+              <c:showSerName val="0"/>
+              <c:showPercent val="0"/>
+              <c:showBubbleSize val="0"/>
+            </c:dLbl>
+            <c:dLbl>
+              <c:idx val="2"/>
+              <c:tx>
+                <c:rich>
+                  <a:bodyPr/>
+                  <a:lstStyle/>
+                  <a:p>
+                    <a:r>
+                      <a:rPr lang="en-US" sz="800"/>
+                      <a:t>0.58</a:t>
+                    </a:r>
+                  </a:p>
+                </c:rich>
+              </c:tx>
+              <c:dLblPos val="outEnd"/>
+              <c:showLegendKey val="0"/>
+              <c:showVal val="0"/>
+              <c:showCatName val="0"/>
+              <c:showSerName val="0"/>
+              <c:showPercent val="0"/>
+              <c:showBubbleSize val="0"/>
+            </c:dLbl>
+            <c:dLblPos val="outEnd"/>
+            <c:showLegendKey val="0"/>
+            <c:showVal val="0"/>
+            <c:showCatName val="0"/>
+            <c:showSerName val="0"/>
+            <c:showPercent val="0"/>
+            <c:showBubbleSize val="0"/>
+          </c:dLbls>
           <c:cat>
             <c:strRef>
               <c:f>Sheet1!$A$2:$A$4</c:f>
@@ -1609,6 +1909,103 @@
               </a:solidFill>
             </c:spPr>
           </c:dPt>
+          <c:dLbls>
+            <c:dLbl>
+              <c:idx val="0"/>
+              <c:tx>
+                <c:rich>
+                  <a:bodyPr/>
+                  <a:lstStyle/>
+                  <a:p>
+                    <a:r>
+                      <a:rPr lang="en-US" sz="800"/>
+                      <a:t>60.0%</a:t>
+                    </a:r>
+                  </a:p>
+                </c:rich>
+              </c:tx>
+              <c:dLblPos val="outEnd"/>
+              <c:showLegendKey val="0"/>
+              <c:showVal val="0"/>
+              <c:showCatName val="0"/>
+              <c:showSerName val="0"/>
+              <c:showPercent val="0"/>
+              <c:showBubbleSize val="0"/>
+            </c:dLbl>
+            <c:dLbl>
+              <c:idx val="1"/>
+              <c:tx>
+                <c:rich>
+                  <a:bodyPr/>
+                  <a:lstStyle/>
+                  <a:p>
+                    <a:r>
+                      <a:rPr lang="en-US" sz="800"/>
+                      <a:t>55.0%</a:t>
+                    </a:r>
+                  </a:p>
+                </c:rich>
+              </c:tx>
+              <c:dLblPos val="outEnd"/>
+              <c:showLegendKey val="0"/>
+              <c:showVal val="0"/>
+              <c:showCatName val="0"/>
+              <c:showSerName val="0"/>
+              <c:showPercent val="0"/>
+              <c:showBubbleSize val="0"/>
+            </c:dLbl>
+            <c:dLbl>
+              <c:idx val="2"/>
+              <c:tx>
+                <c:rich>
+                  <a:bodyPr/>
+                  <a:lstStyle/>
+                  <a:p>
+                    <a:r>
+                      <a:rPr lang="en-US" sz="800"/>
+                      <a:t>40.0%</a:t>
+                    </a:r>
+                  </a:p>
+                </c:rich>
+              </c:tx>
+              <c:dLblPos val="outEnd"/>
+              <c:showLegendKey val="0"/>
+              <c:showVal val="0"/>
+              <c:showCatName val="0"/>
+              <c:showSerName val="0"/>
+              <c:showPercent val="0"/>
+              <c:showBubbleSize val="0"/>
+            </c:dLbl>
+            <c:dLbl>
+              <c:idx val="3"/>
+              <c:tx>
+                <c:rich>
+                  <a:bodyPr/>
+                  <a:lstStyle/>
+                  <a:p>
+                    <a:r>
+                      <a:rPr lang="en-US" sz="800"/>
+                      <a:t>45.0%</a:t>
+                    </a:r>
+                  </a:p>
+                </c:rich>
+              </c:tx>
+              <c:dLblPos val="outEnd"/>
+              <c:showLegendKey val="0"/>
+              <c:showVal val="0"/>
+              <c:showCatName val="0"/>
+              <c:showSerName val="0"/>
+              <c:showPercent val="0"/>
+              <c:showBubbleSize val="0"/>
+            </c:dLbl>
+            <c:dLblPos val="outEnd"/>
+            <c:showLegendKey val="0"/>
+            <c:showVal val="0"/>
+            <c:showCatName val="0"/>
+            <c:showSerName val="0"/>
+            <c:showPercent val="0"/>
+            <c:showBubbleSize val="0"/>
+          </c:dLbls>
           <c:cat>
             <c:strRef>
               <c:f>Sheet1!$A$2:$A$5</c:f>
@@ -2039,6 +2436,15 @@
       <c:legendPos val="b"/>
       <c:layout/>
       <c:overlay val="0"/>
+      <c:txPr>
+        <a:bodyPr/>
+        <a:lstStyle/>
+        <a:p>
+          <a:pPr>
+            <a:defRPr sz="700"/>
+          </a:pPr>
+        </a:p>
+      </c:txPr>
     </c:legend>
     <c:plotVisOnly val="1"/>
     <c:dispBlanksAs val="gap"/>
@@ -2622,6 +3028,103 @@
               </a:solidFill>
             </c:spPr>
           </c:dPt>
+          <c:dLbls>
+            <c:dLbl>
+              <c:idx val="0"/>
+              <c:tx>
+                <c:rich>
+                  <a:bodyPr/>
+                  <a:lstStyle/>
+                  <a:p>
+                    <a:r>
+                      <a:rPr lang="en-US" sz="800"/>
+                      <a:t>7.5%</a:t>
+                    </a:r>
+                  </a:p>
+                </c:rich>
+              </c:tx>
+              <c:dLblPos val="outEnd"/>
+              <c:showLegendKey val="0"/>
+              <c:showVal val="0"/>
+              <c:showCatName val="0"/>
+              <c:showSerName val="0"/>
+              <c:showPercent val="0"/>
+              <c:showBubbleSize val="0"/>
+            </c:dLbl>
+            <c:dLbl>
+              <c:idx val="1"/>
+              <c:tx>
+                <c:rich>
+                  <a:bodyPr/>
+                  <a:lstStyle/>
+                  <a:p>
+                    <a:r>
+                      <a:rPr lang="en-US" sz="800"/>
+                      <a:t>6.8%</a:t>
+                    </a:r>
+                  </a:p>
+                </c:rich>
+              </c:tx>
+              <c:dLblPos val="outEnd"/>
+              <c:showLegendKey val="0"/>
+              <c:showVal val="0"/>
+              <c:showCatName val="0"/>
+              <c:showSerName val="0"/>
+              <c:showPercent val="0"/>
+              <c:showBubbleSize val="0"/>
+            </c:dLbl>
+            <c:dLbl>
+              <c:idx val="2"/>
+              <c:tx>
+                <c:rich>
+                  <a:bodyPr/>
+                  <a:lstStyle/>
+                  <a:p>
+                    <a:r>
+                      <a:rPr lang="en-US" sz="800"/>
+                      <a:t>5.5%</a:t>
+                    </a:r>
+                  </a:p>
+                </c:rich>
+              </c:tx>
+              <c:dLblPos val="outEnd"/>
+              <c:showLegendKey val="0"/>
+              <c:showVal val="0"/>
+              <c:showCatName val="0"/>
+              <c:showSerName val="0"/>
+              <c:showPercent val="0"/>
+              <c:showBubbleSize val="0"/>
+            </c:dLbl>
+            <c:dLbl>
+              <c:idx val="3"/>
+              <c:tx>
+                <c:rich>
+                  <a:bodyPr/>
+                  <a:lstStyle/>
+                  <a:p>
+                    <a:r>
+                      <a:rPr lang="en-US" sz="800"/>
+                      <a:t>5.9%</a:t>
+                    </a:r>
+                  </a:p>
+                </c:rich>
+              </c:tx>
+              <c:dLblPos val="outEnd"/>
+              <c:showLegendKey val="0"/>
+              <c:showVal val="0"/>
+              <c:showCatName val="0"/>
+              <c:showSerName val="0"/>
+              <c:showPercent val="0"/>
+              <c:showBubbleSize val="0"/>
+            </c:dLbl>
+            <c:dLblPos val="outEnd"/>
+            <c:showLegendKey val="0"/>
+            <c:showVal val="0"/>
+            <c:showCatName val="0"/>
+            <c:showSerName val="0"/>
+            <c:showPercent val="0"/>
+            <c:showBubbleSize val="0"/>
+          </c:dLbls>
           <c:cat>
             <c:strRef>
               <c:f>Sheet1!$A$2:$A$5</c:f>
@@ -5648,7 +6151,7 @@
         </p:nvSpPr>
         <p:spPr>
           <a:xfrm>
-            <a:off x="685800" y="1828800"/>
+            <a:off x="685800" y="1664208"/>
             <a:ext cx="9966960" cy="274320"/>
           </a:xfrm>
           <a:prstGeom prst="rect">
@@ -5666,7 +6169,7 @@
               <a:spcAft>
                 <a:spcPts val="0"/>
               </a:spcAft>
-              <a:defRPr sz="900" b="1">
+              <a:defRPr sz="850" b="1">
                 <a:solidFill>
                   <a:srgbClr val="C6F432"/>
                 </a:solidFill>
@@ -5690,7 +6193,7 @@
         </p:nvSpPr>
         <p:spPr>
           <a:xfrm>
-            <a:off x="685800" y="2176272"/>
+            <a:off x="685800" y="2011680"/>
             <a:ext cx="9966960" cy="1234440"/>
           </a:xfrm>
           <a:prstGeom prst="rect">
@@ -5708,7 +6211,7 @@
               <a:spcAft>
                 <a:spcPts val="0"/>
               </a:spcAft>
-              <a:defRPr sz="3400" b="1">
+              <a:defRPr sz="3300" b="1">
                 <a:solidFill>
                   <a:srgbClr val="FFFFFF"/>
                 </a:solidFill>
@@ -5719,7 +6222,7 @@
               <a:rPr>
                 <a:latin typeface="Inter"/>
               </a:rPr>
-              <a:t>Northstar Attribution Comparison (TEST)</a:t>
+              <a:t>Northstar Attribution Comparison</a:t>
             </a:r>
           </a:p>
         </p:txBody>
@@ -5732,8 +6235,8 @@
         </p:nvSpPr>
         <p:spPr>
           <a:xfrm>
-            <a:off x="685800" y="3456432"/>
-            <a:ext cx="9692640" cy="640080"/>
+            <a:off x="685800" y="3273552"/>
+            <a:ext cx="9692640" cy="594360"/>
           </a:xfrm>
           <a:prstGeom prst="rect">
             <a:avLst/>
@@ -5750,7 +6253,7 @@
               <a:spcAft>
                 <a:spcPts val="0"/>
               </a:spcAft>
-              <a:defRPr sz="1500" b="0">
+              <a:defRPr sz="1400" b="0">
                 <a:solidFill>
                   <a:srgbClr val="9AA5B1"/>
                 </a:solidFill>
@@ -5761,7 +6264,7 @@
               <a:rPr>
                 <a:latin typeface="Inter"/>
               </a:rPr>
-              <a:t>Historical, ex ante and simulated lanes ? governed server comparison</a:t>
+              <a:t>Historical, forward and simulated views</a:t>
             </a:r>
           </a:p>
         </p:txBody>
@@ -5774,8 +6277,8 @@
         </p:nvSpPr>
         <p:spPr>
           <a:xfrm>
-            <a:off x="685800" y="4251960"/>
-            <a:ext cx="1005840" cy="54864"/>
+            <a:off x="685800" y="4005072"/>
+            <a:ext cx="822960" cy="45720"/>
           </a:xfrm>
           <a:prstGeom prst="rect">
             <a:avLst/>
@@ -5823,8 +6326,8 @@
         </p:nvSpPr>
         <p:spPr>
           <a:xfrm>
-            <a:off x="685800" y="4572000"/>
-            <a:ext cx="3063240" cy="182880"/>
+            <a:off x="685800" y="4315968"/>
+            <a:ext cx="4709160" cy="182880"/>
           </a:xfrm>
           <a:prstGeom prst="rect">
             <a:avLst/>
@@ -5865,8 +6368,8 @@
         </p:nvSpPr>
         <p:spPr>
           <a:xfrm>
-            <a:off x="685800" y="4773168"/>
-            <a:ext cx="3063240" cy="320040"/>
+            <a:off x="685800" y="4507992"/>
+            <a:ext cx="4709160" cy="310896"/>
           </a:xfrm>
           <a:prstGeom prst="rect">
             <a:avLst/>
@@ -5894,7 +6397,7 @@
               <a:rPr>
                 <a:latin typeface="Inter"/>
               </a:rPr>
-              <a:t>Northstar (TEST)</a:t>
+              <a:t>Northstar Total Fund</a:t>
             </a:r>
           </a:p>
         </p:txBody>
@@ -5907,8 +6410,8 @@
         </p:nvSpPr>
         <p:spPr>
           <a:xfrm>
-            <a:off x="4160520" y="4572000"/>
-            <a:ext cx="3063240" cy="182880"/>
+            <a:off x="5852160" y="4315968"/>
+            <a:ext cx="4709160" cy="182880"/>
           </a:xfrm>
           <a:prstGeom prst="rect">
             <a:avLst/>
@@ -5936,7 +6439,7 @@
               <a:rPr>
                 <a:latin typeface="Inter"/>
               </a:rPr>
-              <a:t>MODE</a:t>
+              <a:t>VIEWS</a:t>
             </a:r>
           </a:p>
         </p:txBody>
@@ -5949,8 +6452,8 @@
         </p:nvSpPr>
         <p:spPr>
           <a:xfrm>
-            <a:off x="4160520" y="4773168"/>
-            <a:ext cx="3063240" cy="320040"/>
+            <a:off x="5852160" y="4507992"/>
+            <a:ext cx="4709160" cy="310896"/>
           </a:xfrm>
           <a:prstGeom prst="rect">
             <a:avLst/>
@@ -5978,21 +6481,189 @@
               <a:rPr>
                 <a:latin typeface="Inter"/>
               </a:rPr>
-              <a:t>Three lane</a:t>
-            </a:r>
-          </a:p>
-        </p:txBody>
-      </p:sp>
-      <p:sp>
-        <p:nvSpPr>
-          <p:cNvPr id="13" name="Rectangle 12"/>
+              <a:t>Three</a:t>
+            </a:r>
+          </a:p>
+        </p:txBody>
+      </p:sp>
+      <p:sp>
+        <p:nvSpPr>
+          <p:cNvPr id="13" name="TextBox 12"/>
+          <p:cNvSpPr txBox="1"/>
+          <p:nvPr/>
+        </p:nvSpPr>
+        <p:spPr>
+          <a:xfrm>
+            <a:off x="685800" y="4937759"/>
+            <a:ext cx="4709160" cy="182880"/>
+          </a:xfrm>
+          <a:prstGeom prst="rect">
+            <a:avLst/>
+          </a:prstGeom>
+          <a:noFill/>
+        </p:spPr>
+        <p:txBody>
+          <a:bodyPr wrap="none" lIns="9144" rIns="9144" tIns="9144" bIns="9144" anchor="t">
+            <a:spAutoFit/>
+          </a:bodyPr>
+          <a:lstStyle/>
+          <a:p>
+            <a:pPr algn="l">
+              <a:spcAft>
+                <a:spcPts val="0"/>
+              </a:spcAft>
+              <a:defRPr sz="700" b="1">
+                <a:solidFill>
+                  <a:srgbClr val="8A94A1"/>
+                </a:solidFill>
+                <a:latin typeface="Inter"/>
+              </a:defRPr>
+            </a:pPr>
+            <a:r>
+              <a:rPr>
+                <a:latin typeface="Inter"/>
+              </a:rPr>
+              <a:t>AUDIENCE</a:t>
+            </a:r>
+          </a:p>
+        </p:txBody>
+      </p:sp>
+      <p:sp>
+        <p:nvSpPr>
+          <p:cNvPr id="14" name="TextBox 13"/>
+          <p:cNvSpPr txBox="1"/>
+          <p:nvPr/>
+        </p:nvSpPr>
+        <p:spPr>
+          <a:xfrm>
+            <a:off x="685800" y="5129783"/>
+            <a:ext cx="4709160" cy="310896"/>
+          </a:xfrm>
+          <a:prstGeom prst="rect">
+            <a:avLst/>
+          </a:prstGeom>
+          <a:noFill/>
+        </p:spPr>
+        <p:txBody>
+          <a:bodyPr wrap="none" lIns="9144" rIns="9144" tIns="9144" bIns="9144" anchor="t">
+            <a:spAutoFit/>
+          </a:bodyPr>
+          <a:lstStyle/>
+          <a:p>
+            <a:pPr algn="l">
+              <a:spcAft>
+                <a:spcPts val="0"/>
+              </a:spcAft>
+              <a:defRPr sz="1000" b="1">
+                <a:solidFill>
+                  <a:srgbClr val="FFFFFF"/>
+                </a:solidFill>
+                <a:latin typeface="Inter"/>
+              </a:defRPr>
+            </a:pPr>
+            <a:r>
+              <a:rPr>
+                <a:latin typeface="Inter"/>
+              </a:rPr>
+              <a:t>Investment Committee</a:t>
+            </a:r>
+          </a:p>
+        </p:txBody>
+      </p:sp>
+      <p:sp>
+        <p:nvSpPr>
+          <p:cNvPr id="15" name="TextBox 14"/>
+          <p:cNvSpPr txBox="1"/>
+          <p:nvPr/>
+        </p:nvSpPr>
+        <p:spPr>
+          <a:xfrm>
+            <a:off x="5852160" y="4937759"/>
+            <a:ext cx="4709160" cy="182880"/>
+          </a:xfrm>
+          <a:prstGeom prst="rect">
+            <a:avLst/>
+          </a:prstGeom>
+          <a:noFill/>
+        </p:spPr>
+        <p:txBody>
+          <a:bodyPr wrap="none" lIns="9144" rIns="9144" tIns="9144" bIns="9144" anchor="t">
+            <a:spAutoFit/>
+          </a:bodyPr>
+          <a:lstStyle/>
+          <a:p>
+            <a:pPr algn="l">
+              <a:spcAft>
+                <a:spcPts val="0"/>
+              </a:spcAft>
+              <a:defRPr sz="700" b="1">
+                <a:solidFill>
+                  <a:srgbClr val="8A94A1"/>
+                </a:solidFill>
+                <a:latin typeface="Inter"/>
+              </a:defRPr>
+            </a:pPr>
+            <a:r>
+              <a:rPr>
+                <a:latin typeface="Inter"/>
+              </a:rPr>
+              <a:t>DATA AS OF</a:t>
+            </a:r>
+          </a:p>
+        </p:txBody>
+      </p:sp>
+      <p:sp>
+        <p:nvSpPr>
+          <p:cNvPr id="16" name="TextBox 15"/>
+          <p:cNvSpPr txBox="1"/>
+          <p:nvPr/>
+        </p:nvSpPr>
+        <p:spPr>
+          <a:xfrm>
+            <a:off x="5852160" y="5129783"/>
+            <a:ext cx="4709160" cy="310896"/>
+          </a:xfrm>
+          <a:prstGeom prst="rect">
+            <a:avLst/>
+          </a:prstGeom>
+          <a:noFill/>
+        </p:spPr>
+        <p:txBody>
+          <a:bodyPr wrap="none" lIns="9144" rIns="9144" tIns="9144" bIns="9144" anchor="t">
+            <a:spAutoFit/>
+          </a:bodyPr>
+          <a:lstStyle/>
+          <a:p>
+            <a:pPr algn="l">
+              <a:spcAft>
+                <a:spcPts val="0"/>
+              </a:spcAft>
+              <a:defRPr sz="1000" b="1">
+                <a:solidFill>
+                  <a:srgbClr val="FFFFFF"/>
+                </a:solidFill>
+                <a:latin typeface="Inter"/>
+              </a:defRPr>
+            </a:pPr>
+            <a:r>
+              <a:rPr>
+                <a:latin typeface="Inter"/>
+              </a:rPr>
+              <a:t>2026-10-08</a:t>
+            </a:r>
+          </a:p>
+        </p:txBody>
+      </p:sp>
+      <p:sp>
+        <p:nvSpPr>
+          <p:cNvPr id="17" name="Rectangle 16"/>
           <p:cNvSpPr/>
           <p:nvPr/>
         </p:nvSpPr>
         <p:spPr>
           <a:xfrm>
-            <a:off x="685800" y="5833872"/>
-            <a:ext cx="3063240" cy="384048"/>
+            <a:off x="685800" y="5687568"/>
+            <a:ext cx="3337560" cy="530352"/>
           </a:xfrm>
           <a:prstGeom prst="rect">
             <a:avLst/>
@@ -6034,14 +6705,14 @@
       </p:sp>
       <p:sp>
         <p:nvSpPr>
-          <p:cNvPr id="14" name="TextBox 13"/>
+          <p:cNvPr id="18" name="TextBox 17"/>
           <p:cNvSpPr txBox="1"/>
           <p:nvPr/>
         </p:nvSpPr>
         <p:spPr>
           <a:xfrm>
-            <a:off x="822960" y="5934456"/>
-            <a:ext cx="2788920" cy="164592"/>
+            <a:off x="822960" y="5760720"/>
+            <a:ext cx="3063240" cy="128016"/>
           </a:xfrm>
           <a:prstGeom prst="rect">
             <a:avLst/>
@@ -6058,7 +6729,7 @@
               <a:spcAft>
                 <a:spcPts val="0"/>
               </a:spcAft>
-              <a:defRPr sz="800" b="1">
+              <a:defRPr sz="620" b="1">
                 <a:solidFill>
                   <a:srgbClr val="0D1117"/>
                 </a:solidFill>
@@ -6069,6 +6740,48 @@
               <a:rPr>
                 <a:latin typeface="Inter"/>
               </a:rPr>
+              <a:t>OVERALL VIEW</a:t>
+            </a:r>
+          </a:p>
+        </p:txBody>
+      </p:sp>
+      <p:sp>
+        <p:nvSpPr>
+          <p:cNvPr id="19" name="TextBox 18"/>
+          <p:cNvSpPr txBox="1"/>
+          <p:nvPr/>
+        </p:nvSpPr>
+        <p:spPr>
+          <a:xfrm>
+            <a:off x="822960" y="5916168"/>
+            <a:ext cx="3063240" cy="182880"/>
+          </a:xfrm>
+          <a:prstGeom prst="rect">
+            <a:avLst/>
+          </a:prstGeom>
+          <a:noFill/>
+        </p:spPr>
+        <p:txBody>
+          <a:bodyPr wrap="none" lIns="9144" rIns="9144" tIns="9144" bIns="9144" anchor="t">
+            <a:spAutoFit/>
+          </a:bodyPr>
+          <a:lstStyle/>
+          <a:p>
+            <a:pPr algn="l">
+              <a:spcAft>
+                <a:spcPts val="0"/>
+              </a:spcAft>
+              <a:defRPr sz="900" b="1">
+                <a:solidFill>
+                  <a:srgbClr val="0D1117"/>
+                </a:solidFill>
+                <a:latin typeface="Inter"/>
+              </a:defRPr>
+            </a:pPr>
+            <a:r>
+              <a:rPr>
+                <a:latin typeface="Inter"/>
+              </a:rPr>
               <a:t>Three compatible lanes compared</a:t>
             </a:r>
           </a:p>
@@ -6076,13 +6789,13 @@
       </p:sp>
       <p:sp>
         <p:nvSpPr>
-          <p:cNvPr id="15" name="TextBox 14"/>
+          <p:cNvPr id="20" name="TextBox 19"/>
           <p:cNvSpPr txBox="1"/>
           <p:nvPr/>
         </p:nvSpPr>
         <p:spPr>
           <a:xfrm>
-            <a:off x="3977639" y="5824728"/>
+            <a:off x="4297680" y="5733288"/>
             <a:ext cx="3108960" cy="164592"/>
           </a:xfrm>
           <a:prstGeom prst="rect">
@@ -6111,20 +6824,20 @@
               <a:rPr>
                 <a:latin typeface="Inter"/>
               </a:rPr>
-              <a:t>EVIDENCE COMPLETENESS</a:t>
-            </a:r>
-          </a:p>
-        </p:txBody>
-      </p:sp>
-      <p:sp>
-        <p:nvSpPr>
-          <p:cNvPr id="16" name="TextBox 15"/>
+              <a:t>SCOPE REVIEWED</a:t>
+            </a:r>
+          </a:p>
+        </p:txBody>
+      </p:sp>
+      <p:sp>
+        <p:nvSpPr>
+          <p:cNvPr id="21" name="TextBox 20"/>
           <p:cNvSpPr txBox="1"/>
           <p:nvPr/>
         </p:nvSpPr>
         <p:spPr>
           <a:xfrm>
-            <a:off x="3977639" y="5998464"/>
+            <a:off x="4297680" y="5934456"/>
             <a:ext cx="3108960" cy="201168"/>
           </a:xfrm>
           <a:prstGeom prst="rect">
@@ -6160,14 +6873,14 @@
       </p:sp>
       <p:sp>
         <p:nvSpPr>
-          <p:cNvPr id="17" name="TextBox 16"/>
+          <p:cNvPr id="22" name="TextBox 21"/>
           <p:cNvSpPr txBox="1"/>
           <p:nvPr/>
         </p:nvSpPr>
         <p:spPr>
           <a:xfrm>
-            <a:off x="685800" y="6473952"/>
-            <a:ext cx="8046720" cy="182880"/>
+            <a:off x="685800" y="6400800"/>
+            <a:ext cx="8046720" cy="146304"/>
           </a:xfrm>
           <a:prstGeom prst="rect">
             <a:avLst/>
@@ -6195,14 +6908,56 @@
               <a:rPr>
                 <a:latin typeface="Inter"/>
               </a:rPr>
-              <a:t>Confidential — prepared for internal investment use</a:t>
-            </a:r>
-          </a:p>
-        </p:txBody>
-      </p:sp>
-      <p:sp>
-        <p:nvSpPr>
-          <p:cNvPr id="18" name="TextBox 17"/>
+              <a:t>Confidential — Investment Committee</a:t>
+            </a:r>
+          </a:p>
+        </p:txBody>
+      </p:sp>
+      <p:sp>
+        <p:nvSpPr>
+          <p:cNvPr id="23" name="TextBox 22"/>
+          <p:cNvSpPr txBox="1"/>
+          <p:nvPr/>
+        </p:nvSpPr>
+        <p:spPr>
+          <a:xfrm>
+            <a:off x="685800" y="6556248"/>
+            <a:ext cx="8046720" cy="128016"/>
+          </a:xfrm>
+          <a:prstGeom prst="rect">
+            <a:avLst/>
+          </a:prstGeom>
+          <a:noFill/>
+        </p:spPr>
+        <p:txBody>
+          <a:bodyPr wrap="none" lIns="9144" rIns="9144" tIns="9144" bIns="9144" anchor="t">
+            <a:spAutoFit/>
+          </a:bodyPr>
+          <a:lstStyle/>
+          <a:p>
+            <a:pPr algn="l">
+              <a:spcAft>
+                <a:spcPts val="0"/>
+              </a:spcAft>
+              <a:defRPr sz="650" b="0">
+                <a:solidFill>
+                  <a:srgbClr val="8A94A1"/>
+                </a:solidFill>
+                <a:latin typeface="Inter"/>
+              </a:defRPr>
+            </a:pPr>
+            <a:r>
+              <a:rPr>
+                <a:latin typeface="Inter"/>
+              </a:rPr>
+              <a:t>Illustrative sample · not client data</a:t>
+            </a:r>
+          </a:p>
+        </p:txBody>
+      </p:sp>
+      <p:sp>
+        <p:nvSpPr>
+          <p:cNvPr id="24" name="TextBox 23"/>
           <p:cNvSpPr txBox="1"/>
           <p:nvPr/>
         </p:nvSpPr>
@@ -6318,7 +7073,7 @@
         <p:spPr>
           <a:xfrm>
             <a:off x="640080" y="329184"/>
-            <a:ext cx="9875520" cy="182880"/>
+            <a:ext cx="5303520" cy="182880"/>
           </a:xfrm>
           <a:prstGeom prst="rect">
             <a:avLst/>
@@ -6359,6 +7114,48 @@
         </p:nvSpPr>
         <p:spPr>
           <a:xfrm>
+            <a:off x="5897880" y="310896"/>
+            <a:ext cx="4800600" cy="256032"/>
+          </a:xfrm>
+          <a:prstGeom prst="rect">
+            <a:avLst/>
+          </a:prstGeom>
+          <a:noFill/>
+        </p:spPr>
+        <p:txBody>
+          <a:bodyPr wrap="none" lIns="9144" rIns="9144" tIns="9144" bIns="9144" anchor="t">
+            <a:spAutoFit/>
+          </a:bodyPr>
+          <a:lstStyle/>
+          <a:p>
+            <a:pPr algn="r">
+              <a:spcAft>
+                <a:spcPts val="0"/>
+              </a:spcAft>
+              <a:defRPr sz="680" b="1">
+                <a:solidFill>
+                  <a:srgbClr val="4F6B00"/>
+                </a:solidFill>
+                <a:latin typeface="Inter"/>
+              </a:defRPr>
+            </a:pPr>
+            <a:r>
+              <a:rPr>
+                <a:latin typeface="Inter"/>
+              </a:rPr>
+              <a:t>Illustrative, Gradient Maintained — demo data, not the client's holdings or managers</a:t>
+            </a:r>
+          </a:p>
+        </p:txBody>
+      </p:sp>
+      <p:sp>
+        <p:nvSpPr>
+          <p:cNvPr id="5" name="TextBox 4"/>
+          <p:cNvSpPr txBox="1"/>
+          <p:nvPr/>
+        </p:nvSpPr>
+        <p:spPr>
+          <a:xfrm>
             <a:off x="640080" y="566928"/>
             <a:ext cx="10058400" cy="530352"/>
           </a:xfrm>
@@ -6395,7 +7192,7 @@
       </p:sp>
       <p:sp>
         <p:nvSpPr>
-          <p:cNvPr id="5" name="Rectangle 4"/>
+          <p:cNvPr id="6" name="Rectangle 5"/>
           <p:cNvSpPr/>
           <p:nvPr/>
         </p:nvSpPr>
@@ -6444,7 +7241,7 @@
       </p:sp>
       <p:sp>
         <p:nvSpPr>
-          <p:cNvPr id="6" name="Rectangle 5"/>
+          <p:cNvPr id="7" name="Rectangle 6"/>
           <p:cNvSpPr/>
           <p:nvPr/>
         </p:nvSpPr>
@@ -6493,7 +7290,7 @@
       </p:sp>
       <p:sp>
         <p:nvSpPr>
-          <p:cNvPr id="7" name="TextBox 6"/>
+          <p:cNvPr id="8" name="TextBox 7"/>
           <p:cNvSpPr txBox="1"/>
           <p:nvPr/>
         </p:nvSpPr>
@@ -6535,7 +7332,7 @@
       </p:sp>
       <p:sp>
         <p:nvSpPr>
-          <p:cNvPr id="8" name="TextBox 7"/>
+          <p:cNvPr id="9" name="TextBox 8"/>
           <p:cNvSpPr txBox="1"/>
           <p:nvPr/>
         </p:nvSpPr>
@@ -6577,7 +7374,7 @@
       </p:sp>
       <p:graphicFrame>
         <p:nvGraphicFramePr>
-          <p:cNvPr id="9" name="Chart 8"/>
+          <p:cNvPr id="10" name="Chart 9"/>
           <p:cNvGraphicFramePr>
             <a:graphicFrameLocks noGrp="1"/>
           </p:cNvGraphicFramePr>
@@ -6595,7 +7392,7 @@
       </p:graphicFrame>
       <p:sp>
         <p:nvSpPr>
-          <p:cNvPr id="10" name="Rectangle 9"/>
+          <p:cNvPr id="11" name="Rectangle 10"/>
           <p:cNvSpPr/>
           <p:nvPr/>
         </p:nvSpPr>
@@ -6644,7 +7441,7 @@
       </p:sp>
       <p:sp>
         <p:nvSpPr>
-          <p:cNvPr id="11" name="TextBox 10"/>
+          <p:cNvPr id="12" name="TextBox 11"/>
           <p:cNvSpPr txBox="1"/>
           <p:nvPr/>
         </p:nvSpPr>
@@ -6686,7 +7483,7 @@
       </p:sp>
       <p:sp>
         <p:nvSpPr>
-          <p:cNvPr id="12" name="TextBox 11"/>
+          <p:cNvPr id="13" name="TextBox 12"/>
           <p:cNvSpPr txBox="1"/>
           <p:nvPr/>
         </p:nvSpPr>
@@ -6721,14 +7518,14 @@
               <a:rPr>
                 <a:latin typeface="Inter"/>
               </a:rPr>
-              <a:t>Confidential — prepared for internal investment use · Data as of 2026-06-30</a:t>
-            </a:r>
-          </a:p>
-        </p:txBody>
-      </p:sp>
-      <p:sp>
-        <p:nvSpPr>
-          <p:cNvPr id="13" name="TextBox 12"/>
+              <a:t>Confidential — Investment Committee · Data as of 2026-06-30</a:t>
+            </a:r>
+          </a:p>
+        </p:txBody>
+      </p:sp>
+      <p:sp>
+        <p:nvSpPr>
+          <p:cNvPr id="14" name="TextBox 13"/>
           <p:cNvSpPr txBox="1"/>
           <p:nvPr/>
         </p:nvSpPr>
@@ -6844,7 +7641,7 @@
         <p:spPr>
           <a:xfrm>
             <a:off x="640080" y="329184"/>
-            <a:ext cx="9875520" cy="182880"/>
+            <a:ext cx="5303520" cy="182880"/>
           </a:xfrm>
           <a:prstGeom prst="rect">
             <a:avLst/>
@@ -6885,6 +7682,48 @@
         </p:nvSpPr>
         <p:spPr>
           <a:xfrm>
+            <a:off x="5897880" y="310896"/>
+            <a:ext cx="4800600" cy="256032"/>
+          </a:xfrm>
+          <a:prstGeom prst="rect">
+            <a:avLst/>
+          </a:prstGeom>
+          <a:noFill/>
+        </p:spPr>
+        <p:txBody>
+          <a:bodyPr wrap="none" lIns="9144" rIns="9144" tIns="9144" bIns="9144" anchor="t">
+            <a:spAutoFit/>
+          </a:bodyPr>
+          <a:lstStyle/>
+          <a:p>
+            <a:pPr algn="r">
+              <a:spcAft>
+                <a:spcPts val="0"/>
+              </a:spcAft>
+              <a:defRPr sz="680" b="1">
+                <a:solidFill>
+                  <a:srgbClr val="4F6B00"/>
+                </a:solidFill>
+                <a:latin typeface="Inter"/>
+              </a:defRPr>
+            </a:pPr>
+            <a:r>
+              <a:rPr>
+                <a:latin typeface="Inter"/>
+              </a:rPr>
+              <a:t>Illustrative, Gradient Maintained — demo data, not the client's holdings or managers</a:t>
+            </a:r>
+          </a:p>
+        </p:txBody>
+      </p:sp>
+      <p:sp>
+        <p:nvSpPr>
+          <p:cNvPr id="5" name="TextBox 4"/>
+          <p:cNvSpPr txBox="1"/>
+          <p:nvPr/>
+        </p:nvSpPr>
+        <p:spPr>
+          <a:xfrm>
             <a:off x="640080" y="566928"/>
             <a:ext cx="10058400" cy="530352"/>
           </a:xfrm>
@@ -6921,7 +7760,7 @@
       </p:sp>
       <p:sp>
         <p:nvSpPr>
-          <p:cNvPr id="5" name="Rectangle 4"/>
+          <p:cNvPr id="6" name="Rectangle 5"/>
           <p:cNvSpPr/>
           <p:nvPr/>
         </p:nvSpPr>
@@ -6970,7 +7809,7 @@
       </p:sp>
       <p:sp>
         <p:nvSpPr>
-          <p:cNvPr id="6" name="Rectangle 5"/>
+          <p:cNvPr id="7" name="Rectangle 6"/>
           <p:cNvSpPr/>
           <p:nvPr/>
         </p:nvSpPr>
@@ -7019,7 +7858,7 @@
       </p:sp>
       <p:sp>
         <p:nvSpPr>
-          <p:cNvPr id="7" name="TextBox 6"/>
+          <p:cNvPr id="8" name="TextBox 7"/>
           <p:cNvSpPr txBox="1"/>
           <p:nvPr/>
         </p:nvSpPr>
@@ -7061,7 +7900,7 @@
       </p:sp>
       <p:sp>
         <p:nvSpPr>
-          <p:cNvPr id="8" name="TextBox 7"/>
+          <p:cNvPr id="9" name="TextBox 8"/>
           <p:cNvSpPr txBox="1"/>
           <p:nvPr/>
         </p:nvSpPr>
@@ -7103,7 +7942,7 @@
       </p:sp>
       <p:graphicFrame>
         <p:nvGraphicFramePr>
-          <p:cNvPr id="9" name="Chart 8"/>
+          <p:cNvPr id="10" name="Chart 9"/>
           <p:cNvGraphicFramePr>
             <a:graphicFrameLocks noGrp="1"/>
           </p:cNvGraphicFramePr>
@@ -7121,7 +7960,7 @@
       </p:graphicFrame>
       <p:sp>
         <p:nvSpPr>
-          <p:cNvPr id="10" name="Rectangle 9"/>
+          <p:cNvPr id="11" name="Rectangle 10"/>
           <p:cNvSpPr/>
           <p:nvPr/>
         </p:nvSpPr>
@@ -7170,7 +8009,7 @@
       </p:sp>
       <p:sp>
         <p:nvSpPr>
-          <p:cNvPr id="11" name="TextBox 10"/>
+          <p:cNvPr id="12" name="TextBox 11"/>
           <p:cNvSpPr txBox="1"/>
           <p:nvPr/>
         </p:nvSpPr>
@@ -7212,7 +8051,7 @@
       </p:sp>
       <p:sp>
         <p:nvSpPr>
-          <p:cNvPr id="12" name="TextBox 11"/>
+          <p:cNvPr id="13" name="TextBox 12"/>
           <p:cNvSpPr txBox="1"/>
           <p:nvPr/>
         </p:nvSpPr>
@@ -7247,14 +8086,14 @@
               <a:rPr>
                 <a:latin typeface="Inter"/>
               </a:rPr>
-              <a:t>Confidential — prepared for internal investment use · Data as of 2026-06-30</a:t>
-            </a:r>
-          </a:p>
-        </p:txBody>
-      </p:sp>
-      <p:sp>
-        <p:nvSpPr>
-          <p:cNvPr id="13" name="TextBox 12"/>
+              <a:t>Confidential — Investment Committee · Data as of 2026-06-30</a:t>
+            </a:r>
+          </a:p>
+        </p:txBody>
+      </p:sp>
+      <p:sp>
+        <p:nvSpPr>
+          <p:cNvPr id="14" name="TextBox 13"/>
           <p:cNvSpPr txBox="1"/>
           <p:nvPr/>
         </p:nvSpPr>
@@ -7370,7 +8209,7 @@
         <p:spPr>
           <a:xfrm>
             <a:off x="640080" y="329184"/>
-            <a:ext cx="9875520" cy="182880"/>
+            <a:ext cx="5303520" cy="182880"/>
           </a:xfrm>
           <a:prstGeom prst="rect">
             <a:avLst/>
@@ -7411,6 +8250,48 @@
         </p:nvSpPr>
         <p:spPr>
           <a:xfrm>
+            <a:off x="5897880" y="310896"/>
+            <a:ext cx="4800600" cy="256032"/>
+          </a:xfrm>
+          <a:prstGeom prst="rect">
+            <a:avLst/>
+          </a:prstGeom>
+          <a:noFill/>
+        </p:spPr>
+        <p:txBody>
+          <a:bodyPr wrap="none" lIns="9144" rIns="9144" tIns="9144" bIns="9144" anchor="t">
+            <a:spAutoFit/>
+          </a:bodyPr>
+          <a:lstStyle/>
+          <a:p>
+            <a:pPr algn="r">
+              <a:spcAft>
+                <a:spcPts val="0"/>
+              </a:spcAft>
+              <a:defRPr sz="680" b="1">
+                <a:solidFill>
+                  <a:srgbClr val="4F6B00"/>
+                </a:solidFill>
+                <a:latin typeface="Inter"/>
+              </a:defRPr>
+            </a:pPr>
+            <a:r>
+              <a:rPr>
+                <a:latin typeface="Inter"/>
+              </a:rPr>
+              <a:t>Illustrative, Gradient Maintained — demo data, not the client's holdings or managers</a:t>
+            </a:r>
+          </a:p>
+        </p:txBody>
+      </p:sp>
+      <p:sp>
+        <p:nvSpPr>
+          <p:cNvPr id="5" name="TextBox 4"/>
+          <p:cNvSpPr txBox="1"/>
+          <p:nvPr/>
+        </p:nvSpPr>
+        <p:spPr>
+          <a:xfrm>
             <a:off x="640080" y="566928"/>
             <a:ext cx="10058400" cy="530352"/>
           </a:xfrm>
@@ -7447,7 +8328,7 @@
       </p:sp>
       <p:sp>
         <p:nvSpPr>
-          <p:cNvPr id="5" name="Rectangle 4"/>
+          <p:cNvPr id="6" name="Rectangle 5"/>
           <p:cNvSpPr/>
           <p:nvPr/>
         </p:nvSpPr>
@@ -7496,7 +8377,7 @@
       </p:sp>
       <p:sp>
         <p:nvSpPr>
-          <p:cNvPr id="6" name="Rectangle 5"/>
+          <p:cNvPr id="7" name="Rectangle 6"/>
           <p:cNvSpPr/>
           <p:nvPr/>
         </p:nvSpPr>
@@ -7545,7 +8426,7 @@
       </p:sp>
       <p:sp>
         <p:nvSpPr>
-          <p:cNvPr id="7" name="TextBox 6"/>
+          <p:cNvPr id="8" name="TextBox 7"/>
           <p:cNvSpPr txBox="1"/>
           <p:nvPr/>
         </p:nvSpPr>
@@ -7587,7 +8468,7 @@
       </p:sp>
       <p:sp>
         <p:nvSpPr>
-          <p:cNvPr id="8" name="Rectangle 7"/>
+          <p:cNvPr id="9" name="Rectangle 8"/>
           <p:cNvSpPr/>
           <p:nvPr/>
         </p:nvSpPr>
@@ -7636,7 +8517,7 @@
       </p:sp>
       <p:sp>
         <p:nvSpPr>
-          <p:cNvPr id="9" name="Rectangle 8"/>
+          <p:cNvPr id="10" name="Rectangle 9"/>
           <p:cNvSpPr/>
           <p:nvPr/>
         </p:nvSpPr>
@@ -7685,7 +8566,7 @@
       </p:sp>
       <p:sp>
         <p:nvSpPr>
-          <p:cNvPr id="10" name="TextBox 9"/>
+          <p:cNvPr id="11" name="TextBox 10"/>
           <p:cNvSpPr txBox="1"/>
           <p:nvPr/>
         </p:nvSpPr>
@@ -7727,7 +8608,7 @@
       </p:sp>
       <p:sp>
         <p:nvSpPr>
-          <p:cNvPr id="11" name="TextBox 10"/>
+          <p:cNvPr id="12" name="TextBox 11"/>
           <p:cNvSpPr txBox="1"/>
           <p:nvPr/>
         </p:nvSpPr>
@@ -7769,7 +8650,7 @@
       </p:sp>
       <p:sp>
         <p:nvSpPr>
-          <p:cNvPr id="12" name="Rectangle 11"/>
+          <p:cNvPr id="13" name="Rectangle 12"/>
           <p:cNvSpPr/>
           <p:nvPr/>
         </p:nvSpPr>
@@ -7818,7 +8699,7 @@
       </p:sp>
       <p:sp>
         <p:nvSpPr>
-          <p:cNvPr id="13" name="Rectangle 12"/>
+          <p:cNvPr id="14" name="Rectangle 13"/>
           <p:cNvSpPr/>
           <p:nvPr/>
         </p:nvSpPr>
@@ -7867,7 +8748,7 @@
       </p:sp>
       <p:sp>
         <p:nvSpPr>
-          <p:cNvPr id="14" name="TextBox 13"/>
+          <p:cNvPr id="15" name="TextBox 14"/>
           <p:cNvSpPr txBox="1"/>
           <p:nvPr/>
         </p:nvSpPr>
@@ -7909,7 +8790,7 @@
       </p:sp>
       <p:sp>
         <p:nvSpPr>
-          <p:cNvPr id="15" name="TextBox 14"/>
+          <p:cNvPr id="16" name="TextBox 15"/>
           <p:cNvSpPr txBox="1"/>
           <p:nvPr/>
         </p:nvSpPr>
@@ -7951,7 +8832,7 @@
       </p:sp>
       <p:sp>
         <p:nvSpPr>
-          <p:cNvPr id="16" name="Rectangle 15"/>
+          <p:cNvPr id="17" name="Rectangle 16"/>
           <p:cNvSpPr/>
           <p:nvPr/>
         </p:nvSpPr>
@@ -8000,7 +8881,7 @@
       </p:sp>
       <p:sp>
         <p:nvSpPr>
-          <p:cNvPr id="17" name="TextBox 16"/>
+          <p:cNvPr id="18" name="TextBox 17"/>
           <p:cNvSpPr txBox="1"/>
           <p:nvPr/>
         </p:nvSpPr>
@@ -8042,7 +8923,7 @@
       </p:sp>
       <p:sp>
         <p:nvSpPr>
-          <p:cNvPr id="18" name="TextBox 17"/>
+          <p:cNvPr id="19" name="TextBox 18"/>
           <p:cNvSpPr txBox="1"/>
           <p:nvPr/>
         </p:nvSpPr>
@@ -8077,14 +8958,14 @@
               <a:rPr>
                 <a:latin typeface="Inter"/>
               </a:rPr>
-              <a:t>Confidential — prepared for internal investment use · Data as of 2026-06-30</a:t>
-            </a:r>
-          </a:p>
-        </p:txBody>
-      </p:sp>
-      <p:sp>
-        <p:nvSpPr>
-          <p:cNvPr id="19" name="TextBox 18"/>
+              <a:t>Confidential — Investment Committee · Data as of 2026-06-30</a:t>
+            </a:r>
+          </a:p>
+        </p:txBody>
+      </p:sp>
+      <p:sp>
+        <p:nvSpPr>
+          <p:cNvPr id="20" name="TextBox 19"/>
           <p:cNvSpPr txBox="1"/>
           <p:nvPr/>
         </p:nvSpPr>
@@ -8200,7 +9081,7 @@
         <p:spPr>
           <a:xfrm>
             <a:off x="640080" y="329184"/>
-            <a:ext cx="9875520" cy="182880"/>
+            <a:ext cx="5303520" cy="182880"/>
           </a:xfrm>
           <a:prstGeom prst="rect">
             <a:avLst/>
@@ -8241,6 +9122,48 @@
         </p:nvSpPr>
         <p:spPr>
           <a:xfrm>
+            <a:off x="5897880" y="310896"/>
+            <a:ext cx="4800600" cy="256032"/>
+          </a:xfrm>
+          <a:prstGeom prst="rect">
+            <a:avLst/>
+          </a:prstGeom>
+          <a:noFill/>
+        </p:spPr>
+        <p:txBody>
+          <a:bodyPr wrap="none" lIns="9144" rIns="9144" tIns="9144" bIns="9144" anchor="t">
+            <a:spAutoFit/>
+          </a:bodyPr>
+          <a:lstStyle/>
+          <a:p>
+            <a:pPr algn="r">
+              <a:spcAft>
+                <a:spcPts val="0"/>
+              </a:spcAft>
+              <a:defRPr sz="680" b="1">
+                <a:solidFill>
+                  <a:srgbClr val="4F6B00"/>
+                </a:solidFill>
+                <a:latin typeface="Inter"/>
+              </a:defRPr>
+            </a:pPr>
+            <a:r>
+              <a:rPr>
+                <a:latin typeface="Inter"/>
+              </a:rPr>
+              <a:t>Illustrative, Gradient Maintained — demo data, not the client's holdings or managers</a:t>
+            </a:r>
+          </a:p>
+        </p:txBody>
+      </p:sp>
+      <p:sp>
+        <p:nvSpPr>
+          <p:cNvPr id="5" name="TextBox 4"/>
+          <p:cNvSpPr txBox="1"/>
+          <p:nvPr/>
+        </p:nvSpPr>
+        <p:spPr>
+          <a:xfrm>
             <a:off x="640080" y="566928"/>
             <a:ext cx="10058400" cy="530352"/>
           </a:xfrm>
@@ -8277,7 +9200,7 @@
       </p:sp>
       <p:sp>
         <p:nvSpPr>
-          <p:cNvPr id="5" name="Rectangle 4"/>
+          <p:cNvPr id="6" name="Rectangle 5"/>
           <p:cNvSpPr/>
           <p:nvPr/>
         </p:nvSpPr>
@@ -8326,7 +9249,7 @@
       </p:sp>
       <p:sp>
         <p:nvSpPr>
-          <p:cNvPr id="6" name="Rectangle 5"/>
+          <p:cNvPr id="7" name="Rectangle 6"/>
           <p:cNvSpPr/>
           <p:nvPr/>
         </p:nvSpPr>
@@ -8375,7 +9298,7 @@
       </p:sp>
       <p:sp>
         <p:nvSpPr>
-          <p:cNvPr id="7" name="TextBox 6"/>
+          <p:cNvPr id="8" name="TextBox 7"/>
           <p:cNvSpPr txBox="1"/>
           <p:nvPr/>
         </p:nvSpPr>
@@ -8417,7 +9340,7 @@
       </p:sp>
       <p:sp>
         <p:nvSpPr>
-          <p:cNvPr id="8" name="TextBox 7"/>
+          <p:cNvPr id="9" name="TextBox 8"/>
           <p:cNvSpPr txBox="1"/>
           <p:nvPr/>
         </p:nvSpPr>
@@ -8459,7 +9382,7 @@
       </p:sp>
       <p:graphicFrame>
         <p:nvGraphicFramePr>
-          <p:cNvPr id="9" name="Chart 8"/>
+          <p:cNvPr id="10" name="Chart 9"/>
           <p:cNvGraphicFramePr>
             <a:graphicFrameLocks noGrp="1"/>
           </p:cNvGraphicFramePr>
@@ -8477,7 +9400,7 @@
       </p:graphicFrame>
       <p:sp>
         <p:nvSpPr>
-          <p:cNvPr id="10" name="Rectangle 9"/>
+          <p:cNvPr id="11" name="Rectangle 10"/>
           <p:cNvSpPr/>
           <p:nvPr/>
         </p:nvSpPr>
@@ -8526,7 +9449,7 @@
       </p:sp>
       <p:sp>
         <p:nvSpPr>
-          <p:cNvPr id="11" name="TextBox 10"/>
+          <p:cNvPr id="12" name="TextBox 11"/>
           <p:cNvSpPr txBox="1"/>
           <p:nvPr/>
         </p:nvSpPr>
@@ -8568,7 +9491,7 @@
       </p:sp>
       <p:sp>
         <p:nvSpPr>
-          <p:cNvPr id="12" name="TextBox 11"/>
+          <p:cNvPr id="13" name="TextBox 12"/>
           <p:cNvSpPr txBox="1"/>
           <p:nvPr/>
         </p:nvSpPr>
@@ -8603,14 +9526,14 @@
               <a:rPr>
                 <a:latin typeface="Inter"/>
               </a:rPr>
-              <a:t>Confidential — prepared for internal investment use · Data as of 2026-06-30</a:t>
-            </a:r>
-          </a:p>
-        </p:txBody>
-      </p:sp>
-      <p:sp>
-        <p:nvSpPr>
-          <p:cNvPr id="13" name="TextBox 12"/>
+              <a:t>Confidential — Investment Committee · Data as of 2026-06-30</a:t>
+            </a:r>
+          </a:p>
+        </p:txBody>
+      </p:sp>
+      <p:sp>
+        <p:nvSpPr>
+          <p:cNvPr id="14" name="TextBox 13"/>
           <p:cNvSpPr txBox="1"/>
           <p:nvPr/>
         </p:nvSpPr>
@@ -8726,7 +9649,7 @@
         <p:spPr>
           <a:xfrm>
             <a:off x="640080" y="329184"/>
-            <a:ext cx="9875520" cy="182880"/>
+            <a:ext cx="5303520" cy="182880"/>
           </a:xfrm>
           <a:prstGeom prst="rect">
             <a:avLst/>
@@ -8767,6 +9690,48 @@
         </p:nvSpPr>
         <p:spPr>
           <a:xfrm>
+            <a:off x="5897880" y="310896"/>
+            <a:ext cx="4800600" cy="256032"/>
+          </a:xfrm>
+          <a:prstGeom prst="rect">
+            <a:avLst/>
+          </a:prstGeom>
+          <a:noFill/>
+        </p:spPr>
+        <p:txBody>
+          <a:bodyPr wrap="none" lIns="9144" rIns="9144" tIns="9144" bIns="9144" anchor="t">
+            <a:spAutoFit/>
+          </a:bodyPr>
+          <a:lstStyle/>
+          <a:p>
+            <a:pPr algn="r">
+              <a:spcAft>
+                <a:spcPts val="0"/>
+              </a:spcAft>
+              <a:defRPr sz="680" b="1">
+                <a:solidFill>
+                  <a:srgbClr val="4F6B00"/>
+                </a:solidFill>
+                <a:latin typeface="Inter"/>
+              </a:defRPr>
+            </a:pPr>
+            <a:r>
+              <a:rPr>
+                <a:latin typeface="Inter"/>
+              </a:rPr>
+              <a:t>Illustrative, Gradient Maintained — demo data, not the client's holdings or managers</a:t>
+            </a:r>
+          </a:p>
+        </p:txBody>
+      </p:sp>
+      <p:sp>
+        <p:nvSpPr>
+          <p:cNvPr id="5" name="TextBox 4"/>
+          <p:cNvSpPr txBox="1"/>
+          <p:nvPr/>
+        </p:nvSpPr>
+        <p:spPr>
+          <a:xfrm>
             <a:off x="640080" y="566928"/>
             <a:ext cx="10058400" cy="530352"/>
           </a:xfrm>
@@ -8803,7 +9768,7 @@
       </p:sp>
       <p:sp>
         <p:nvSpPr>
-          <p:cNvPr id="5" name="Rectangle 4"/>
+          <p:cNvPr id="6" name="Rectangle 5"/>
           <p:cNvSpPr/>
           <p:nvPr/>
         </p:nvSpPr>
@@ -8852,7 +9817,7 @@
       </p:sp>
       <p:sp>
         <p:nvSpPr>
-          <p:cNvPr id="6" name="Rectangle 5"/>
+          <p:cNvPr id="7" name="Rectangle 6"/>
           <p:cNvSpPr/>
           <p:nvPr/>
         </p:nvSpPr>
@@ -8901,7 +9866,7 @@
       </p:sp>
       <p:sp>
         <p:nvSpPr>
-          <p:cNvPr id="7" name="TextBox 6"/>
+          <p:cNvPr id="8" name="TextBox 7"/>
           <p:cNvSpPr txBox="1"/>
           <p:nvPr/>
         </p:nvSpPr>
@@ -8943,7 +9908,7 @@
       </p:sp>
       <p:sp>
         <p:nvSpPr>
-          <p:cNvPr id="8" name="TextBox 7"/>
+          <p:cNvPr id="9" name="TextBox 8"/>
           <p:cNvSpPr txBox="1"/>
           <p:nvPr/>
         </p:nvSpPr>
@@ -8985,7 +9950,7 @@
       </p:sp>
       <p:graphicFrame>
         <p:nvGraphicFramePr>
-          <p:cNvPr id="9" name="Table 8"/>
+          <p:cNvPr id="10" name="Table 9"/>
           <p:cNvGraphicFramePr>
             <a:graphicFrameLocks noGrp="1"/>
           </p:cNvGraphicFramePr>
@@ -9050,7 +10015,7 @@
                         <a:rPr>
                           <a:latin typeface="Inter"/>
                         </a:rPr>
-                        <a:t>2026 Strategic CMA (TEST) [S3]</a:t>
+                        <a:t>2026 Strategic CMA [S3]</a:t>
                       </a:r>
                     </a:p>
                   </a:txBody>
@@ -9291,7 +10256,7 @@
       </p:graphicFrame>
       <p:sp>
         <p:nvSpPr>
-          <p:cNvPr id="10" name="Rectangle 9"/>
+          <p:cNvPr id="11" name="Rectangle 10"/>
           <p:cNvSpPr/>
           <p:nvPr/>
         </p:nvSpPr>
@@ -9340,7 +10305,7 @@
       </p:sp>
       <p:sp>
         <p:nvSpPr>
-          <p:cNvPr id="11" name="TextBox 10"/>
+          <p:cNvPr id="12" name="TextBox 11"/>
           <p:cNvSpPr txBox="1"/>
           <p:nvPr/>
         </p:nvSpPr>
@@ -9382,7 +10347,7 @@
       </p:sp>
       <p:graphicFrame>
         <p:nvGraphicFramePr>
-          <p:cNvPr id="12" name="Chart 11"/>
+          <p:cNvPr id="13" name="Chart 12"/>
           <p:cNvGraphicFramePr>
             <a:graphicFrameLocks noGrp="1"/>
           </p:cNvGraphicFramePr>
@@ -9400,7 +10365,7 @@
       </p:graphicFrame>
       <p:sp>
         <p:nvSpPr>
-          <p:cNvPr id="13" name="Rectangle 12"/>
+          <p:cNvPr id="14" name="Rectangle 13"/>
           <p:cNvSpPr/>
           <p:nvPr/>
         </p:nvSpPr>
@@ -9449,7 +10414,7 @@
       </p:sp>
       <p:sp>
         <p:nvSpPr>
-          <p:cNvPr id="14" name="TextBox 13"/>
+          <p:cNvPr id="15" name="TextBox 14"/>
           <p:cNvSpPr txBox="1"/>
           <p:nvPr/>
         </p:nvSpPr>
@@ -9491,7 +10456,7 @@
       </p:sp>
       <p:sp>
         <p:nvSpPr>
-          <p:cNvPr id="15" name="TextBox 14"/>
+          <p:cNvPr id="16" name="TextBox 15"/>
           <p:cNvSpPr txBox="1"/>
           <p:nvPr/>
         </p:nvSpPr>
@@ -9526,14 +10491,14 @@
               <a:rPr>
                 <a:latin typeface="Inter"/>
               </a:rPr>
-              <a:t>Confidential — prepared for internal investment use · Data as of 2026-06-30</a:t>
-            </a:r>
-          </a:p>
-        </p:txBody>
-      </p:sp>
-      <p:sp>
-        <p:nvSpPr>
-          <p:cNvPr id="16" name="TextBox 15"/>
+              <a:t>Confidential — Investment Committee · Data as of 2026-06-30</a:t>
+            </a:r>
+          </a:p>
+        </p:txBody>
+      </p:sp>
+      <p:sp>
+        <p:nvSpPr>
+          <p:cNvPr id="17" name="TextBox 16"/>
           <p:cNvSpPr txBox="1"/>
           <p:nvPr/>
         </p:nvSpPr>
@@ -9649,7 +10614,7 @@
         <p:spPr>
           <a:xfrm>
             <a:off x="640080" y="329184"/>
-            <a:ext cx="9875520" cy="182880"/>
+            <a:ext cx="5303520" cy="182880"/>
           </a:xfrm>
           <a:prstGeom prst="rect">
             <a:avLst/>
@@ -9690,6 +10655,48 @@
         </p:nvSpPr>
         <p:spPr>
           <a:xfrm>
+            <a:off x="5897880" y="310896"/>
+            <a:ext cx="4800600" cy="256032"/>
+          </a:xfrm>
+          <a:prstGeom prst="rect">
+            <a:avLst/>
+          </a:prstGeom>
+          <a:noFill/>
+        </p:spPr>
+        <p:txBody>
+          <a:bodyPr wrap="none" lIns="9144" rIns="9144" tIns="9144" bIns="9144" anchor="t">
+            <a:spAutoFit/>
+          </a:bodyPr>
+          <a:lstStyle/>
+          <a:p>
+            <a:pPr algn="r">
+              <a:spcAft>
+                <a:spcPts val="0"/>
+              </a:spcAft>
+              <a:defRPr sz="680" b="1">
+                <a:solidFill>
+                  <a:srgbClr val="4F6B00"/>
+                </a:solidFill>
+                <a:latin typeface="Inter"/>
+              </a:defRPr>
+            </a:pPr>
+            <a:r>
+              <a:rPr>
+                <a:latin typeface="Inter"/>
+              </a:rPr>
+              <a:t>Illustrative, Gradient Maintained — demo data, not the client's holdings or managers</a:t>
+            </a:r>
+          </a:p>
+        </p:txBody>
+      </p:sp>
+      <p:sp>
+        <p:nvSpPr>
+          <p:cNvPr id="5" name="TextBox 4"/>
+          <p:cNvSpPr txBox="1"/>
+          <p:nvPr/>
+        </p:nvSpPr>
+        <p:spPr>
+          <a:xfrm>
             <a:off x="640080" y="566928"/>
             <a:ext cx="10058400" cy="530352"/>
           </a:xfrm>
@@ -9726,7 +10733,7 @@
       </p:sp>
       <p:sp>
         <p:nvSpPr>
-          <p:cNvPr id="5" name="Rectangle 4"/>
+          <p:cNvPr id="6" name="Rectangle 5"/>
           <p:cNvSpPr/>
           <p:nvPr/>
         </p:nvSpPr>
@@ -9775,7 +10782,7 @@
       </p:sp>
       <p:sp>
         <p:nvSpPr>
-          <p:cNvPr id="6" name="Rectangle 5"/>
+          <p:cNvPr id="7" name="Rectangle 6"/>
           <p:cNvSpPr/>
           <p:nvPr/>
         </p:nvSpPr>
@@ -9824,7 +10831,7 @@
       </p:sp>
       <p:sp>
         <p:nvSpPr>
-          <p:cNvPr id="7" name="TextBox 6"/>
+          <p:cNvPr id="8" name="TextBox 7"/>
           <p:cNvSpPr txBox="1"/>
           <p:nvPr/>
         </p:nvSpPr>
@@ -9866,7 +10873,7 @@
       </p:sp>
       <p:sp>
         <p:nvSpPr>
-          <p:cNvPr id="8" name="Rectangle 7"/>
+          <p:cNvPr id="9" name="Rectangle 8"/>
           <p:cNvSpPr/>
           <p:nvPr/>
         </p:nvSpPr>
@@ -9915,7 +10922,7 @@
       </p:sp>
       <p:sp>
         <p:nvSpPr>
-          <p:cNvPr id="9" name="Rectangle 8"/>
+          <p:cNvPr id="10" name="Rectangle 9"/>
           <p:cNvSpPr/>
           <p:nvPr/>
         </p:nvSpPr>
@@ -9964,7 +10971,7 @@
       </p:sp>
       <p:sp>
         <p:nvSpPr>
-          <p:cNvPr id="10" name="TextBox 9"/>
+          <p:cNvPr id="11" name="TextBox 10"/>
           <p:cNvSpPr txBox="1"/>
           <p:nvPr/>
         </p:nvSpPr>
@@ -10006,7 +11013,7 @@
       </p:sp>
       <p:sp>
         <p:nvSpPr>
-          <p:cNvPr id="11" name="TextBox 10"/>
+          <p:cNvPr id="12" name="TextBox 11"/>
           <p:cNvSpPr txBox="1"/>
           <p:nvPr/>
         </p:nvSpPr>
@@ -10048,7 +11055,7 @@
       </p:sp>
       <p:sp>
         <p:nvSpPr>
-          <p:cNvPr id="12" name="Rectangle 11"/>
+          <p:cNvPr id="13" name="Rectangle 12"/>
           <p:cNvSpPr/>
           <p:nvPr/>
         </p:nvSpPr>
@@ -10097,7 +11104,7 @@
       </p:sp>
       <p:sp>
         <p:nvSpPr>
-          <p:cNvPr id="13" name="TextBox 12"/>
+          <p:cNvPr id="14" name="TextBox 13"/>
           <p:cNvSpPr txBox="1"/>
           <p:nvPr/>
         </p:nvSpPr>
@@ -10139,7 +11146,7 @@
       </p:sp>
       <p:sp>
         <p:nvSpPr>
-          <p:cNvPr id="14" name="TextBox 13"/>
+          <p:cNvPr id="15" name="TextBox 14"/>
           <p:cNvSpPr txBox="1"/>
           <p:nvPr/>
         </p:nvSpPr>
@@ -10174,14 +11181,14 @@
               <a:rPr>
                 <a:latin typeface="Inter"/>
               </a:rPr>
-              <a:t>Confidential — prepared for internal investment use · Data as of 2026-06-30</a:t>
-            </a:r>
-          </a:p>
-        </p:txBody>
-      </p:sp>
-      <p:sp>
-        <p:nvSpPr>
-          <p:cNvPr id="15" name="TextBox 14"/>
+              <a:t>Confidential — Investment Committee · Data as of 2026-06-30</a:t>
+            </a:r>
+          </a:p>
+        </p:txBody>
+      </p:sp>
+      <p:sp>
+        <p:nvSpPr>
+          <p:cNvPr id="16" name="TextBox 15"/>
           <p:cNvSpPr txBox="1"/>
           <p:nvPr/>
         </p:nvSpPr>
@@ -10297,7 +11304,7 @@
         <p:spPr>
           <a:xfrm>
             <a:off x="640080" y="329184"/>
-            <a:ext cx="9875520" cy="182880"/>
+            <a:ext cx="5303520" cy="182880"/>
           </a:xfrm>
           <a:prstGeom prst="rect">
             <a:avLst/>
@@ -10338,6 +11345,48 @@
         </p:nvSpPr>
         <p:spPr>
           <a:xfrm>
+            <a:off x="5897880" y="310896"/>
+            <a:ext cx="4800600" cy="256032"/>
+          </a:xfrm>
+          <a:prstGeom prst="rect">
+            <a:avLst/>
+          </a:prstGeom>
+          <a:noFill/>
+        </p:spPr>
+        <p:txBody>
+          <a:bodyPr wrap="none" lIns="9144" rIns="9144" tIns="9144" bIns="9144" anchor="t">
+            <a:spAutoFit/>
+          </a:bodyPr>
+          <a:lstStyle/>
+          <a:p>
+            <a:pPr algn="r">
+              <a:spcAft>
+                <a:spcPts val="0"/>
+              </a:spcAft>
+              <a:defRPr sz="680" b="1">
+                <a:solidFill>
+                  <a:srgbClr val="4F6B00"/>
+                </a:solidFill>
+                <a:latin typeface="Inter"/>
+              </a:defRPr>
+            </a:pPr>
+            <a:r>
+              <a:rPr>
+                <a:latin typeface="Inter"/>
+              </a:rPr>
+              <a:t>Illustrative, Gradient Maintained — demo data, not the client's holdings or managers</a:t>
+            </a:r>
+          </a:p>
+        </p:txBody>
+      </p:sp>
+      <p:sp>
+        <p:nvSpPr>
+          <p:cNvPr id="5" name="TextBox 4"/>
+          <p:cNvSpPr txBox="1"/>
+          <p:nvPr/>
+        </p:nvSpPr>
+        <p:spPr>
+          <a:xfrm>
             <a:off x="640080" y="566928"/>
             <a:ext cx="10058400" cy="530352"/>
           </a:xfrm>
@@ -10374,7 +11423,7 @@
       </p:sp>
       <p:sp>
         <p:nvSpPr>
-          <p:cNvPr id="5" name="Rectangle 4"/>
+          <p:cNvPr id="6" name="Rectangle 5"/>
           <p:cNvSpPr/>
           <p:nvPr/>
         </p:nvSpPr>
@@ -10423,7 +11472,7 @@
       </p:sp>
       <p:sp>
         <p:nvSpPr>
-          <p:cNvPr id="6" name="Rectangle 5"/>
+          <p:cNvPr id="7" name="Rectangle 6"/>
           <p:cNvSpPr/>
           <p:nvPr/>
         </p:nvSpPr>
@@ -10472,7 +11521,7 @@
       </p:sp>
       <p:sp>
         <p:nvSpPr>
-          <p:cNvPr id="7" name="TextBox 6"/>
+          <p:cNvPr id="8" name="TextBox 7"/>
           <p:cNvSpPr txBox="1"/>
           <p:nvPr/>
         </p:nvSpPr>
@@ -10514,7 +11563,7 @@
       </p:sp>
       <p:sp>
         <p:nvSpPr>
-          <p:cNvPr id="8" name="TextBox 7"/>
+          <p:cNvPr id="9" name="TextBox 8"/>
           <p:cNvSpPr txBox="1"/>
           <p:nvPr/>
         </p:nvSpPr>
@@ -10556,7 +11605,7 @@
       </p:sp>
       <p:sp>
         <p:nvSpPr>
-          <p:cNvPr id="9" name="TextBox 8"/>
+          <p:cNvPr id="10" name="TextBox 9"/>
           <p:cNvSpPr txBox="1"/>
           <p:nvPr/>
         </p:nvSpPr>
@@ -10598,7 +11647,7 @@
       </p:sp>
       <p:sp>
         <p:nvSpPr>
-          <p:cNvPr id="10" name="Rectangle 9"/>
+          <p:cNvPr id="11" name="Rectangle 10"/>
           <p:cNvSpPr/>
           <p:nvPr/>
         </p:nvSpPr>
@@ -10647,7 +11696,7 @@
       </p:sp>
       <p:sp>
         <p:nvSpPr>
-          <p:cNvPr id="11" name="Oval 10"/>
+          <p:cNvPr id="12" name="Oval 11"/>
           <p:cNvSpPr/>
           <p:nvPr/>
         </p:nvSpPr>
@@ -10696,7 +11745,7 @@
       </p:sp>
       <p:sp>
         <p:nvSpPr>
-          <p:cNvPr id="12" name="Rectangle 11"/>
+          <p:cNvPr id="13" name="Rectangle 12"/>
           <p:cNvSpPr/>
           <p:nvPr/>
         </p:nvSpPr>
@@ -10745,7 +11794,7 @@
       </p:sp>
       <p:sp>
         <p:nvSpPr>
-          <p:cNvPr id="13" name="TextBox 12"/>
+          <p:cNvPr id="14" name="TextBox 13"/>
           <p:cNvSpPr txBox="1"/>
           <p:nvPr/>
         </p:nvSpPr>
@@ -10787,7 +11836,7 @@
       </p:sp>
       <p:sp>
         <p:nvSpPr>
-          <p:cNvPr id="14" name="Rectangle 13"/>
+          <p:cNvPr id="15" name="Rectangle 14"/>
           <p:cNvSpPr/>
           <p:nvPr/>
         </p:nvSpPr>
@@ -10836,7 +11885,7 @@
       </p:sp>
       <p:sp>
         <p:nvSpPr>
-          <p:cNvPr id="15" name="Oval 14"/>
+          <p:cNvPr id="16" name="Oval 15"/>
           <p:cNvSpPr/>
           <p:nvPr/>
         </p:nvSpPr>
@@ -10885,7 +11934,7 @@
       </p:sp>
       <p:sp>
         <p:nvSpPr>
-          <p:cNvPr id="16" name="Rectangle 15"/>
+          <p:cNvPr id="17" name="Rectangle 16"/>
           <p:cNvSpPr/>
           <p:nvPr/>
         </p:nvSpPr>
@@ -10934,7 +11983,7 @@
       </p:sp>
       <p:sp>
         <p:nvSpPr>
-          <p:cNvPr id="17" name="TextBox 16"/>
+          <p:cNvPr id="18" name="TextBox 17"/>
           <p:cNvSpPr txBox="1"/>
           <p:nvPr/>
         </p:nvSpPr>
@@ -10976,7 +12025,7 @@
       </p:sp>
       <p:sp>
         <p:nvSpPr>
-          <p:cNvPr id="18" name="Rectangle 17"/>
+          <p:cNvPr id="19" name="Rectangle 18"/>
           <p:cNvSpPr/>
           <p:nvPr/>
         </p:nvSpPr>
@@ -11025,7 +12074,7 @@
       </p:sp>
       <p:sp>
         <p:nvSpPr>
-          <p:cNvPr id="19" name="Oval 18"/>
+          <p:cNvPr id="20" name="Oval 19"/>
           <p:cNvSpPr/>
           <p:nvPr/>
         </p:nvSpPr>
@@ -11074,7 +12123,7 @@
       </p:sp>
       <p:sp>
         <p:nvSpPr>
-          <p:cNvPr id="20" name="Rectangle 19"/>
+          <p:cNvPr id="21" name="Rectangle 20"/>
           <p:cNvSpPr/>
           <p:nvPr/>
         </p:nvSpPr>
@@ -11123,7 +12172,7 @@
       </p:sp>
       <p:sp>
         <p:nvSpPr>
-          <p:cNvPr id="21" name="Rectangle 20"/>
+          <p:cNvPr id="22" name="Rectangle 21"/>
           <p:cNvSpPr/>
           <p:nvPr/>
         </p:nvSpPr>
@@ -11172,7 +12221,7 @@
       </p:sp>
       <p:sp>
         <p:nvSpPr>
-          <p:cNvPr id="22" name="TextBox 21"/>
+          <p:cNvPr id="23" name="TextBox 22"/>
           <p:cNvSpPr txBox="1"/>
           <p:nvPr/>
         </p:nvSpPr>
@@ -11214,7 +12263,7 @@
       </p:sp>
       <p:sp>
         <p:nvSpPr>
-          <p:cNvPr id="23" name="TextBox 22"/>
+          <p:cNvPr id="24" name="TextBox 23"/>
           <p:cNvSpPr txBox="1"/>
           <p:nvPr/>
         </p:nvSpPr>
@@ -11249,14 +12298,14 @@
               <a:rPr>
                 <a:latin typeface="Inter"/>
               </a:rPr>
-              <a:t>Confidential — prepared for internal investment use · Data as of 2026-06-30</a:t>
-            </a:r>
-          </a:p>
-        </p:txBody>
-      </p:sp>
-      <p:sp>
-        <p:nvSpPr>
-          <p:cNvPr id="24" name="TextBox 23"/>
+              <a:t>Confidential — Investment Committee · Data as of 2026-06-30</a:t>
+            </a:r>
+          </a:p>
+        </p:txBody>
+      </p:sp>
+      <p:sp>
+        <p:nvSpPr>
+          <p:cNvPr id="25" name="TextBox 24"/>
           <p:cNvSpPr txBox="1"/>
           <p:nvPr/>
         </p:nvSpPr>
@@ -11372,7 +12421,7 @@
         <p:spPr>
           <a:xfrm>
             <a:off x="640080" y="329184"/>
-            <a:ext cx="9875520" cy="182880"/>
+            <a:ext cx="5303520" cy="182880"/>
           </a:xfrm>
           <a:prstGeom prst="rect">
             <a:avLst/>
@@ -11413,6 +12462,48 @@
         </p:nvSpPr>
         <p:spPr>
           <a:xfrm>
+            <a:off x="5897880" y="310896"/>
+            <a:ext cx="4800600" cy="256032"/>
+          </a:xfrm>
+          <a:prstGeom prst="rect">
+            <a:avLst/>
+          </a:prstGeom>
+          <a:noFill/>
+        </p:spPr>
+        <p:txBody>
+          <a:bodyPr wrap="none" lIns="9144" rIns="9144" tIns="9144" bIns="9144" anchor="t">
+            <a:spAutoFit/>
+          </a:bodyPr>
+          <a:lstStyle/>
+          <a:p>
+            <a:pPr algn="r">
+              <a:spcAft>
+                <a:spcPts val="0"/>
+              </a:spcAft>
+              <a:defRPr sz="680" b="1">
+                <a:solidFill>
+                  <a:srgbClr val="4F6B00"/>
+                </a:solidFill>
+                <a:latin typeface="Inter"/>
+              </a:defRPr>
+            </a:pPr>
+            <a:r>
+              <a:rPr>
+                <a:latin typeface="Inter"/>
+              </a:rPr>
+              <a:t>Illustrative, Gradient Maintained — demo data, not the client's holdings or managers</a:t>
+            </a:r>
+          </a:p>
+        </p:txBody>
+      </p:sp>
+      <p:sp>
+        <p:nvSpPr>
+          <p:cNvPr id="5" name="TextBox 4"/>
+          <p:cNvSpPr txBox="1"/>
+          <p:nvPr/>
+        </p:nvSpPr>
+        <p:spPr>
+          <a:xfrm>
             <a:off x="640080" y="566928"/>
             <a:ext cx="10058400" cy="530352"/>
           </a:xfrm>
@@ -11449,7 +12540,7 @@
       </p:sp>
       <p:sp>
         <p:nvSpPr>
-          <p:cNvPr id="5" name="Rectangle 4"/>
+          <p:cNvPr id="6" name="Rectangle 5"/>
           <p:cNvSpPr/>
           <p:nvPr/>
         </p:nvSpPr>
@@ -11498,7 +12589,7 @@
       </p:sp>
       <p:sp>
         <p:nvSpPr>
-          <p:cNvPr id="6" name="Rectangle 5"/>
+          <p:cNvPr id="7" name="Rectangle 6"/>
           <p:cNvSpPr/>
           <p:nvPr/>
         </p:nvSpPr>
@@ -11547,7 +12638,7 @@
       </p:sp>
       <p:sp>
         <p:nvSpPr>
-          <p:cNvPr id="7" name="TextBox 6"/>
+          <p:cNvPr id="8" name="TextBox 7"/>
           <p:cNvSpPr txBox="1"/>
           <p:nvPr/>
         </p:nvSpPr>
@@ -11589,7 +12680,7 @@
       </p:sp>
       <p:sp>
         <p:nvSpPr>
-          <p:cNvPr id="8" name="TextBox 7"/>
+          <p:cNvPr id="9" name="TextBox 8"/>
           <p:cNvSpPr txBox="1"/>
           <p:nvPr/>
         </p:nvSpPr>
@@ -11631,7 +12722,7 @@
       </p:sp>
       <p:graphicFrame>
         <p:nvGraphicFramePr>
-          <p:cNvPr id="9" name="Table 8"/>
+          <p:cNvPr id="10" name="Table 9"/>
           <p:cNvGraphicFramePr>
             <a:graphicFrameLocks noGrp="1"/>
           </p:cNvGraphicFramePr>
@@ -11808,7 +12899,7 @@
                         <a:rPr>
                           <a:latin typeface="Inter"/>
                         </a:rPr>
-                        <a:t>Base scenario (TEST)</a:t>
+                        <a:t>Base scenario</a:t>
                       </a:r>
                     </a:p>
                   </a:txBody>
@@ -11918,7 +13009,7 @@
                         <a:rPr>
                           <a:latin typeface="Inter"/>
                         </a:rPr>
-                        <a:t>Downside scenario (TEST)</a:t>
+                        <a:t>Downside scenario</a:t>
                       </a:r>
                     </a:p>
                   </a:txBody>
@@ -12028,7 +13119,7 @@
                         <a:rPr>
                           <a:latin typeface="Inter"/>
                         </a:rPr>
-                        <a:t>Upside scenario (TEST)</a:t>
+                        <a:t>Upside scenario</a:t>
                       </a:r>
                     </a:p>
                   </a:txBody>
@@ -12099,7 +13190,7 @@
       </p:graphicFrame>
       <p:sp>
         <p:nvSpPr>
-          <p:cNvPr id="10" name="TextBox 9"/>
+          <p:cNvPr id="11" name="TextBox 10"/>
           <p:cNvSpPr txBox="1"/>
           <p:nvPr/>
         </p:nvSpPr>
@@ -12141,7 +13232,7 @@
       </p:sp>
       <p:graphicFrame>
         <p:nvGraphicFramePr>
-          <p:cNvPr id="11" name="Table 10"/>
+          <p:cNvPr id="12" name="Table 11"/>
           <p:cNvGraphicFramePr>
             <a:graphicFrameLocks noGrp="1"/>
           </p:cNvGraphicFramePr>
@@ -12334,7 +13425,7 @@
       </p:graphicFrame>
       <p:sp>
         <p:nvSpPr>
-          <p:cNvPr id="12" name="Rectangle 11"/>
+          <p:cNvPr id="13" name="Rectangle 12"/>
           <p:cNvSpPr/>
           <p:nvPr/>
         </p:nvSpPr>
@@ -12383,7 +13474,7 @@
       </p:sp>
       <p:sp>
         <p:nvSpPr>
-          <p:cNvPr id="13" name="Rectangle 12"/>
+          <p:cNvPr id="14" name="Rectangle 13"/>
           <p:cNvSpPr/>
           <p:nvPr/>
         </p:nvSpPr>
@@ -12432,7 +13523,7 @@
       </p:sp>
       <p:sp>
         <p:nvSpPr>
-          <p:cNvPr id="14" name="TextBox 13"/>
+          <p:cNvPr id="15" name="TextBox 14"/>
           <p:cNvSpPr txBox="1"/>
           <p:nvPr/>
         </p:nvSpPr>
@@ -12474,7 +13565,7 @@
       </p:sp>
       <p:sp>
         <p:nvSpPr>
-          <p:cNvPr id="15" name="TextBox 14"/>
+          <p:cNvPr id="16" name="TextBox 15"/>
           <p:cNvSpPr txBox="1"/>
           <p:nvPr/>
         </p:nvSpPr>
@@ -12516,7 +13607,7 @@
       </p:sp>
       <p:sp>
         <p:nvSpPr>
-          <p:cNvPr id="16" name="Rectangle 15"/>
+          <p:cNvPr id="17" name="Rectangle 16"/>
           <p:cNvSpPr/>
           <p:nvPr/>
         </p:nvSpPr>
@@ -12565,7 +13656,7 @@
       </p:sp>
       <p:sp>
         <p:nvSpPr>
-          <p:cNvPr id="17" name="TextBox 16"/>
+          <p:cNvPr id="18" name="TextBox 17"/>
           <p:cNvSpPr txBox="1"/>
           <p:nvPr/>
         </p:nvSpPr>
@@ -12607,7 +13698,7 @@
       </p:sp>
       <p:sp>
         <p:nvSpPr>
-          <p:cNvPr id="18" name="TextBox 17"/>
+          <p:cNvPr id="19" name="TextBox 18"/>
           <p:cNvSpPr txBox="1"/>
           <p:nvPr/>
         </p:nvSpPr>
@@ -12642,14 +13733,14 @@
               <a:rPr>
                 <a:latin typeface="Inter"/>
               </a:rPr>
-              <a:t>Confidential — prepared for internal investment use · Data as of 2026-06-30</a:t>
-            </a:r>
-          </a:p>
-        </p:txBody>
-      </p:sp>
-      <p:sp>
-        <p:nvSpPr>
-          <p:cNvPr id="19" name="TextBox 18"/>
+              <a:t>Confidential — Investment Committee · Data as of 2026-06-30</a:t>
+            </a:r>
+          </a:p>
+        </p:txBody>
+      </p:sp>
+      <p:sp>
+        <p:nvSpPr>
+          <p:cNvPr id="20" name="TextBox 19"/>
           <p:cNvSpPr txBox="1"/>
           <p:nvPr/>
         </p:nvSpPr>
@@ -12765,7 +13856,7 @@
         <p:spPr>
           <a:xfrm>
             <a:off x="640080" y="329184"/>
-            <a:ext cx="9875520" cy="182880"/>
+            <a:ext cx="5303520" cy="182880"/>
           </a:xfrm>
           <a:prstGeom prst="rect">
             <a:avLst/>
@@ -12806,6 +13897,48 @@
         </p:nvSpPr>
         <p:spPr>
           <a:xfrm>
+            <a:off x="5897880" y="310896"/>
+            <a:ext cx="4800600" cy="256032"/>
+          </a:xfrm>
+          <a:prstGeom prst="rect">
+            <a:avLst/>
+          </a:prstGeom>
+          <a:noFill/>
+        </p:spPr>
+        <p:txBody>
+          <a:bodyPr wrap="none" lIns="9144" rIns="9144" tIns="9144" bIns="9144" anchor="t">
+            <a:spAutoFit/>
+          </a:bodyPr>
+          <a:lstStyle/>
+          <a:p>
+            <a:pPr algn="r">
+              <a:spcAft>
+                <a:spcPts val="0"/>
+              </a:spcAft>
+              <a:defRPr sz="680" b="1">
+                <a:solidFill>
+                  <a:srgbClr val="4F6B00"/>
+                </a:solidFill>
+                <a:latin typeface="Inter"/>
+              </a:defRPr>
+            </a:pPr>
+            <a:r>
+              <a:rPr>
+                <a:latin typeface="Inter"/>
+              </a:rPr>
+              <a:t>Illustrative, Gradient Maintained — demo data, not the client's holdings or managers</a:t>
+            </a:r>
+          </a:p>
+        </p:txBody>
+      </p:sp>
+      <p:sp>
+        <p:nvSpPr>
+          <p:cNvPr id="5" name="TextBox 4"/>
+          <p:cNvSpPr txBox="1"/>
+          <p:nvPr/>
+        </p:nvSpPr>
+        <p:spPr>
+          <a:xfrm>
             <a:off x="640080" y="566928"/>
             <a:ext cx="10058400" cy="530352"/>
           </a:xfrm>
@@ -12842,7 +13975,7 @@
       </p:sp>
       <p:sp>
         <p:nvSpPr>
-          <p:cNvPr id="5" name="Rectangle 4"/>
+          <p:cNvPr id="6" name="Rectangle 5"/>
           <p:cNvSpPr/>
           <p:nvPr/>
         </p:nvSpPr>
@@ -12891,7 +14024,7 @@
       </p:sp>
       <p:sp>
         <p:nvSpPr>
-          <p:cNvPr id="6" name="Rectangle 5"/>
+          <p:cNvPr id="7" name="Rectangle 6"/>
           <p:cNvSpPr/>
           <p:nvPr/>
         </p:nvSpPr>
@@ -12940,7 +14073,7 @@
       </p:sp>
       <p:sp>
         <p:nvSpPr>
-          <p:cNvPr id="7" name="TextBox 6"/>
+          <p:cNvPr id="8" name="TextBox 7"/>
           <p:cNvSpPr txBox="1"/>
           <p:nvPr/>
         </p:nvSpPr>
@@ -12982,7 +14115,7 @@
       </p:sp>
       <p:sp>
         <p:nvSpPr>
-          <p:cNvPr id="8" name="TextBox 7"/>
+          <p:cNvPr id="9" name="TextBox 8"/>
           <p:cNvSpPr txBox="1"/>
           <p:nvPr/>
         </p:nvSpPr>
@@ -13024,7 +14157,7 @@
       </p:sp>
       <p:graphicFrame>
         <p:nvGraphicFramePr>
-          <p:cNvPr id="9" name="Table 8"/>
+          <p:cNvPr id="10" name="Table 9"/>
           <p:cNvGraphicFramePr>
             <a:graphicFrameLocks noGrp="1"/>
           </p:cNvGraphicFramePr>
@@ -13486,7 +14619,7 @@
       </p:graphicFrame>
       <p:sp>
         <p:nvSpPr>
-          <p:cNvPr id="10" name="Rectangle 9"/>
+          <p:cNvPr id="11" name="Rectangle 10"/>
           <p:cNvSpPr/>
           <p:nvPr/>
         </p:nvSpPr>
@@ -13535,7 +14668,7 @@
       </p:sp>
       <p:sp>
         <p:nvSpPr>
-          <p:cNvPr id="11" name="TextBox 10"/>
+          <p:cNvPr id="12" name="TextBox 11"/>
           <p:cNvSpPr txBox="1"/>
           <p:nvPr/>
         </p:nvSpPr>
@@ -13577,7 +14710,7 @@
       </p:sp>
       <p:sp>
         <p:nvSpPr>
-          <p:cNvPr id="12" name="TextBox 11"/>
+          <p:cNvPr id="13" name="TextBox 12"/>
           <p:cNvSpPr txBox="1"/>
           <p:nvPr/>
         </p:nvSpPr>
@@ -13612,14 +14745,14 @@
               <a:rPr>
                 <a:latin typeface="Inter"/>
               </a:rPr>
-              <a:t>Confidential — prepared for internal investment use · Data as of 2026-06-30</a:t>
-            </a:r>
-          </a:p>
-        </p:txBody>
-      </p:sp>
-      <p:sp>
-        <p:nvSpPr>
-          <p:cNvPr id="13" name="TextBox 12"/>
+              <a:t>Confidential — Investment Committee · Data as of 2026-06-30</a:t>
+            </a:r>
+          </a:p>
+        </p:txBody>
+      </p:sp>
+      <p:sp>
+        <p:nvSpPr>
+          <p:cNvPr id="14" name="TextBox 13"/>
           <p:cNvSpPr txBox="1"/>
           <p:nvPr/>
         </p:nvSpPr>
@@ -13735,7 +14868,7 @@
         <p:spPr>
           <a:xfrm>
             <a:off x="640080" y="329184"/>
-            <a:ext cx="9875520" cy="182880"/>
+            <a:ext cx="5303520" cy="182880"/>
           </a:xfrm>
           <a:prstGeom prst="rect">
             <a:avLst/>
@@ -13776,6 +14909,48 @@
         </p:nvSpPr>
         <p:spPr>
           <a:xfrm>
+            <a:off x="5897880" y="310896"/>
+            <a:ext cx="4800600" cy="256032"/>
+          </a:xfrm>
+          <a:prstGeom prst="rect">
+            <a:avLst/>
+          </a:prstGeom>
+          <a:noFill/>
+        </p:spPr>
+        <p:txBody>
+          <a:bodyPr wrap="none" lIns="9144" rIns="9144" tIns="9144" bIns="9144" anchor="t">
+            <a:spAutoFit/>
+          </a:bodyPr>
+          <a:lstStyle/>
+          <a:p>
+            <a:pPr algn="r">
+              <a:spcAft>
+                <a:spcPts val="0"/>
+              </a:spcAft>
+              <a:defRPr sz="680" b="1">
+                <a:solidFill>
+                  <a:srgbClr val="4F6B00"/>
+                </a:solidFill>
+                <a:latin typeface="Inter"/>
+              </a:defRPr>
+            </a:pPr>
+            <a:r>
+              <a:rPr>
+                <a:latin typeface="Inter"/>
+              </a:rPr>
+              <a:t>Illustrative, Gradient Maintained — demo data, not the client's holdings or managers</a:t>
+            </a:r>
+          </a:p>
+        </p:txBody>
+      </p:sp>
+      <p:sp>
+        <p:nvSpPr>
+          <p:cNvPr id="5" name="TextBox 4"/>
+          <p:cNvSpPr txBox="1"/>
+          <p:nvPr/>
+        </p:nvSpPr>
+        <p:spPr>
+          <a:xfrm>
             <a:off x="640080" y="566928"/>
             <a:ext cx="10058400" cy="530352"/>
           </a:xfrm>
@@ -13812,7 +14987,7 @@
       </p:sp>
       <p:sp>
         <p:nvSpPr>
-          <p:cNvPr id="5" name="Rectangle 4"/>
+          <p:cNvPr id="6" name="Rectangle 5"/>
           <p:cNvSpPr/>
           <p:nvPr/>
         </p:nvSpPr>
@@ -13861,7 +15036,7 @@
       </p:sp>
       <p:sp>
         <p:nvSpPr>
-          <p:cNvPr id="6" name="Rectangle 5"/>
+          <p:cNvPr id="7" name="Rectangle 6"/>
           <p:cNvSpPr/>
           <p:nvPr/>
         </p:nvSpPr>
@@ -13910,7 +15085,7 @@
       </p:sp>
       <p:sp>
         <p:nvSpPr>
-          <p:cNvPr id="7" name="TextBox 6"/>
+          <p:cNvPr id="8" name="TextBox 7"/>
           <p:cNvSpPr txBox="1"/>
           <p:nvPr/>
         </p:nvSpPr>
@@ -13952,7 +15127,7 @@
       </p:sp>
       <p:sp>
         <p:nvSpPr>
-          <p:cNvPr id="8" name="TextBox 7"/>
+          <p:cNvPr id="9" name="TextBox 8"/>
           <p:cNvSpPr txBox="1"/>
           <p:nvPr/>
         </p:nvSpPr>
@@ -13994,7 +15169,7 @@
       </p:sp>
       <p:graphicFrame>
         <p:nvGraphicFramePr>
-          <p:cNvPr id="9" name="Chart 8"/>
+          <p:cNvPr id="10" name="Chart 9"/>
           <p:cNvGraphicFramePr>
             <a:graphicFrameLocks noGrp="1"/>
           </p:cNvGraphicFramePr>
@@ -14012,7 +15187,7 @@
       </p:graphicFrame>
       <p:sp>
         <p:nvSpPr>
-          <p:cNvPr id="10" name="Rectangle 9"/>
+          <p:cNvPr id="11" name="Rectangle 10"/>
           <p:cNvSpPr/>
           <p:nvPr/>
         </p:nvSpPr>
@@ -14061,7 +15236,7 @@
       </p:sp>
       <p:sp>
         <p:nvSpPr>
-          <p:cNvPr id="11" name="TextBox 10"/>
+          <p:cNvPr id="12" name="TextBox 11"/>
           <p:cNvSpPr txBox="1"/>
           <p:nvPr/>
         </p:nvSpPr>
@@ -14103,7 +15278,7 @@
       </p:sp>
       <p:graphicFrame>
         <p:nvGraphicFramePr>
-          <p:cNvPr id="12" name="Chart 11"/>
+          <p:cNvPr id="13" name="Chart 12"/>
           <p:cNvGraphicFramePr>
             <a:graphicFrameLocks noGrp="1"/>
           </p:cNvGraphicFramePr>
@@ -14121,7 +15296,7 @@
       </p:graphicFrame>
       <p:sp>
         <p:nvSpPr>
-          <p:cNvPr id="13" name="Rectangle 12"/>
+          <p:cNvPr id="14" name="Rectangle 13"/>
           <p:cNvSpPr/>
           <p:nvPr/>
         </p:nvSpPr>
@@ -14170,7 +15345,7 @@
       </p:sp>
       <p:sp>
         <p:nvSpPr>
-          <p:cNvPr id="14" name="TextBox 13"/>
+          <p:cNvPr id="15" name="TextBox 14"/>
           <p:cNvSpPr txBox="1"/>
           <p:nvPr/>
         </p:nvSpPr>
@@ -14212,7 +15387,7 @@
       </p:sp>
       <p:sp>
         <p:nvSpPr>
-          <p:cNvPr id="15" name="TextBox 14"/>
+          <p:cNvPr id="16" name="TextBox 15"/>
           <p:cNvSpPr txBox="1"/>
           <p:nvPr/>
         </p:nvSpPr>
@@ -14247,14 +15422,14 @@
               <a:rPr>
                 <a:latin typeface="Inter"/>
               </a:rPr>
-              <a:t>Confidential — prepared for internal investment use · Data as of 2026-06-30</a:t>
-            </a:r>
-          </a:p>
-        </p:txBody>
-      </p:sp>
-      <p:sp>
-        <p:nvSpPr>
-          <p:cNvPr id="16" name="TextBox 15"/>
+              <a:t>Confidential — Investment Committee · Data as of 2026-06-30</a:t>
+            </a:r>
+          </a:p>
+        </p:txBody>
+      </p:sp>
+      <p:sp>
+        <p:nvSpPr>
+          <p:cNvPr id="17" name="TextBox 16"/>
           <p:cNvSpPr txBox="1"/>
           <p:nvPr/>
         </p:nvSpPr>
@@ -14370,7 +15545,7 @@
         <p:spPr>
           <a:xfrm>
             <a:off x="640080" y="329184"/>
-            <a:ext cx="9875520" cy="182880"/>
+            <a:ext cx="5303520" cy="182880"/>
           </a:xfrm>
           <a:prstGeom prst="rect">
             <a:avLst/>
@@ -14411,6 +15586,48 @@
         </p:nvSpPr>
         <p:spPr>
           <a:xfrm>
+            <a:off x="5897880" y="310896"/>
+            <a:ext cx="4800600" cy="256032"/>
+          </a:xfrm>
+          <a:prstGeom prst="rect">
+            <a:avLst/>
+          </a:prstGeom>
+          <a:noFill/>
+        </p:spPr>
+        <p:txBody>
+          <a:bodyPr wrap="none" lIns="9144" rIns="9144" tIns="9144" bIns="9144" anchor="t">
+            <a:spAutoFit/>
+          </a:bodyPr>
+          <a:lstStyle/>
+          <a:p>
+            <a:pPr algn="r">
+              <a:spcAft>
+                <a:spcPts val="0"/>
+              </a:spcAft>
+              <a:defRPr sz="680" b="1">
+                <a:solidFill>
+                  <a:srgbClr val="4F6B00"/>
+                </a:solidFill>
+                <a:latin typeface="Inter"/>
+              </a:defRPr>
+            </a:pPr>
+            <a:r>
+              <a:rPr>
+                <a:latin typeface="Inter"/>
+              </a:rPr>
+              <a:t>Illustrative, Gradient Maintained — demo data, not the client's holdings or managers</a:t>
+            </a:r>
+          </a:p>
+        </p:txBody>
+      </p:sp>
+      <p:sp>
+        <p:nvSpPr>
+          <p:cNvPr id="5" name="TextBox 4"/>
+          <p:cNvSpPr txBox="1"/>
+          <p:nvPr/>
+        </p:nvSpPr>
+        <p:spPr>
+          <a:xfrm>
             <a:off x="640080" y="566928"/>
             <a:ext cx="10058400" cy="530352"/>
           </a:xfrm>
@@ -14447,7 +15664,7 @@
       </p:sp>
       <p:sp>
         <p:nvSpPr>
-          <p:cNvPr id="5" name="Rectangle 4"/>
+          <p:cNvPr id="6" name="Rectangle 5"/>
           <p:cNvSpPr/>
           <p:nvPr/>
         </p:nvSpPr>
@@ -14496,7 +15713,7 @@
       </p:sp>
       <p:sp>
         <p:nvSpPr>
-          <p:cNvPr id="6" name="Rectangle 5"/>
+          <p:cNvPr id="7" name="Rectangle 6"/>
           <p:cNvSpPr/>
           <p:nvPr/>
         </p:nvSpPr>
@@ -14545,7 +15762,7 @@
       </p:sp>
       <p:sp>
         <p:nvSpPr>
-          <p:cNvPr id="7" name="TextBox 6"/>
+          <p:cNvPr id="8" name="TextBox 7"/>
           <p:cNvSpPr txBox="1"/>
           <p:nvPr/>
         </p:nvSpPr>
@@ -14587,7 +15804,7 @@
       </p:sp>
       <p:sp>
         <p:nvSpPr>
-          <p:cNvPr id="8" name="Rectangle 7"/>
+          <p:cNvPr id="9" name="Rectangle 8"/>
           <p:cNvSpPr/>
           <p:nvPr/>
         </p:nvSpPr>
@@ -14636,7 +15853,7 @@
       </p:sp>
       <p:sp>
         <p:nvSpPr>
-          <p:cNvPr id="9" name="Rectangle 8"/>
+          <p:cNvPr id="10" name="Rectangle 9"/>
           <p:cNvSpPr/>
           <p:nvPr/>
         </p:nvSpPr>
@@ -14685,7 +15902,7 @@
       </p:sp>
       <p:sp>
         <p:nvSpPr>
-          <p:cNvPr id="10" name="TextBox 9"/>
+          <p:cNvPr id="11" name="TextBox 10"/>
           <p:cNvSpPr txBox="1"/>
           <p:nvPr/>
         </p:nvSpPr>
@@ -14727,7 +15944,7 @@
       </p:sp>
       <p:sp>
         <p:nvSpPr>
-          <p:cNvPr id="11" name="TextBox 10"/>
+          <p:cNvPr id="12" name="TextBox 11"/>
           <p:cNvSpPr txBox="1"/>
           <p:nvPr/>
         </p:nvSpPr>
@@ -14769,7 +15986,7 @@
       </p:sp>
       <p:sp>
         <p:nvSpPr>
-          <p:cNvPr id="12" name="Rectangle 11"/>
+          <p:cNvPr id="13" name="Rectangle 12"/>
           <p:cNvSpPr/>
           <p:nvPr/>
         </p:nvSpPr>
@@ -14818,7 +16035,7 @@
       </p:sp>
       <p:sp>
         <p:nvSpPr>
-          <p:cNvPr id="13" name="Rectangle 12"/>
+          <p:cNvPr id="14" name="Rectangle 13"/>
           <p:cNvSpPr/>
           <p:nvPr/>
         </p:nvSpPr>
@@ -14867,7 +16084,7 @@
       </p:sp>
       <p:sp>
         <p:nvSpPr>
-          <p:cNvPr id="14" name="TextBox 13"/>
+          <p:cNvPr id="15" name="TextBox 14"/>
           <p:cNvSpPr txBox="1"/>
           <p:nvPr/>
         </p:nvSpPr>
@@ -14909,7 +16126,7 @@
       </p:sp>
       <p:sp>
         <p:nvSpPr>
-          <p:cNvPr id="15" name="TextBox 14"/>
+          <p:cNvPr id="16" name="TextBox 15"/>
           <p:cNvSpPr txBox="1"/>
           <p:nvPr/>
         </p:nvSpPr>
@@ -14951,7 +16168,7 @@
       </p:sp>
       <p:sp>
         <p:nvSpPr>
-          <p:cNvPr id="16" name="TextBox 15"/>
+          <p:cNvPr id="17" name="TextBox 16"/>
           <p:cNvSpPr txBox="1"/>
           <p:nvPr/>
         </p:nvSpPr>
@@ -14993,7 +16210,7 @@
       </p:sp>
       <p:sp>
         <p:nvSpPr>
-          <p:cNvPr id="17" name="Rectangle 16"/>
+          <p:cNvPr id="18" name="Rectangle 17"/>
           <p:cNvSpPr/>
           <p:nvPr/>
         </p:nvSpPr>
@@ -15042,7 +16259,7 @@
       </p:sp>
       <p:sp>
         <p:nvSpPr>
-          <p:cNvPr id="18" name="Rectangle 17"/>
+          <p:cNvPr id="19" name="Rectangle 18"/>
           <p:cNvSpPr/>
           <p:nvPr/>
         </p:nvSpPr>
@@ -15091,7 +16308,7 @@
       </p:sp>
       <p:sp>
         <p:nvSpPr>
-          <p:cNvPr id="19" name="TextBox 18"/>
+          <p:cNvPr id="20" name="TextBox 19"/>
           <p:cNvSpPr txBox="1"/>
           <p:nvPr/>
         </p:nvSpPr>
@@ -15133,7 +16350,7 @@
       </p:sp>
       <p:sp>
         <p:nvSpPr>
-          <p:cNvPr id="20" name="TextBox 19"/>
+          <p:cNvPr id="21" name="TextBox 20"/>
           <p:cNvSpPr txBox="1"/>
           <p:nvPr/>
         </p:nvSpPr>
@@ -15175,7 +16392,7 @@
       </p:sp>
       <p:sp>
         <p:nvSpPr>
-          <p:cNvPr id="21" name="TextBox 20"/>
+          <p:cNvPr id="22" name="TextBox 21"/>
           <p:cNvSpPr txBox="1"/>
           <p:nvPr/>
         </p:nvSpPr>
@@ -15217,7 +16434,7 @@
       </p:sp>
       <p:sp>
         <p:nvSpPr>
-          <p:cNvPr id="22" name="Rectangle 21"/>
+          <p:cNvPr id="23" name="Rectangle 22"/>
           <p:cNvSpPr/>
           <p:nvPr/>
         </p:nvSpPr>
@@ -15266,7 +16483,7 @@
       </p:sp>
       <p:sp>
         <p:nvSpPr>
-          <p:cNvPr id="23" name="Rectangle 22"/>
+          <p:cNvPr id="24" name="Rectangle 23"/>
           <p:cNvSpPr/>
           <p:nvPr/>
         </p:nvSpPr>
@@ -15315,7 +16532,7 @@
       </p:sp>
       <p:sp>
         <p:nvSpPr>
-          <p:cNvPr id="24" name="TextBox 23"/>
+          <p:cNvPr id="25" name="TextBox 24"/>
           <p:cNvSpPr txBox="1"/>
           <p:nvPr/>
         </p:nvSpPr>
@@ -15357,7 +16574,7 @@
       </p:sp>
       <p:sp>
         <p:nvSpPr>
-          <p:cNvPr id="25" name="TextBox 24"/>
+          <p:cNvPr id="26" name="TextBox 25"/>
           <p:cNvSpPr txBox="1"/>
           <p:nvPr/>
         </p:nvSpPr>
@@ -15399,7 +16616,7 @@
       </p:sp>
       <p:sp>
         <p:nvSpPr>
-          <p:cNvPr id="26" name="TextBox 25"/>
+          <p:cNvPr id="27" name="TextBox 26"/>
           <p:cNvSpPr txBox="1"/>
           <p:nvPr/>
         </p:nvSpPr>
@@ -15441,7 +16658,7 @@
       </p:sp>
       <p:sp>
         <p:nvSpPr>
-          <p:cNvPr id="27" name="Rectangle 26"/>
+          <p:cNvPr id="28" name="Rectangle 27"/>
           <p:cNvSpPr/>
           <p:nvPr/>
         </p:nvSpPr>
@@ -15490,7 +16707,7 @@
       </p:sp>
       <p:sp>
         <p:nvSpPr>
-          <p:cNvPr id="28" name="Rectangle 27"/>
+          <p:cNvPr id="29" name="Rectangle 28"/>
           <p:cNvSpPr/>
           <p:nvPr/>
         </p:nvSpPr>
@@ -15539,7 +16756,7 @@
       </p:sp>
       <p:sp>
         <p:nvSpPr>
-          <p:cNvPr id="29" name="TextBox 28"/>
+          <p:cNvPr id="30" name="TextBox 29"/>
           <p:cNvSpPr txBox="1"/>
           <p:nvPr/>
         </p:nvSpPr>
@@ -15581,7 +16798,7 @@
       </p:sp>
       <p:sp>
         <p:nvSpPr>
-          <p:cNvPr id="30" name="TextBox 29"/>
+          <p:cNvPr id="31" name="TextBox 30"/>
           <p:cNvSpPr txBox="1"/>
           <p:nvPr/>
         </p:nvSpPr>
@@ -15623,7 +16840,7 @@
       </p:sp>
       <p:sp>
         <p:nvSpPr>
-          <p:cNvPr id="31" name="TextBox 30"/>
+          <p:cNvPr id="32" name="TextBox 31"/>
           <p:cNvSpPr txBox="1"/>
           <p:nvPr/>
         </p:nvSpPr>
@@ -15665,7 +16882,7 @@
       </p:sp>
       <p:sp>
         <p:nvSpPr>
-          <p:cNvPr id="32" name="Rectangle 31"/>
+          <p:cNvPr id="33" name="Rectangle 32"/>
           <p:cNvSpPr/>
           <p:nvPr/>
         </p:nvSpPr>
@@ -15714,7 +16931,7 @@
       </p:sp>
       <p:sp>
         <p:nvSpPr>
-          <p:cNvPr id="33" name="TextBox 32"/>
+          <p:cNvPr id="34" name="TextBox 33"/>
           <p:cNvSpPr txBox="1"/>
           <p:nvPr/>
         </p:nvSpPr>
@@ -15756,7 +16973,7 @@
       </p:sp>
       <p:sp>
         <p:nvSpPr>
-          <p:cNvPr id="34" name="TextBox 33"/>
+          <p:cNvPr id="35" name="TextBox 34"/>
           <p:cNvSpPr txBox="1"/>
           <p:nvPr/>
         </p:nvSpPr>
@@ -15798,7 +17015,7 @@
       </p:sp>
       <p:sp>
         <p:nvSpPr>
-          <p:cNvPr id="35" name="Rectangle 34"/>
+          <p:cNvPr id="36" name="Rectangle 35"/>
           <p:cNvSpPr/>
           <p:nvPr/>
         </p:nvSpPr>
@@ -15847,7 +17064,7 @@
       </p:sp>
       <p:sp>
         <p:nvSpPr>
-          <p:cNvPr id="36" name="TextBox 35"/>
+          <p:cNvPr id="37" name="TextBox 36"/>
           <p:cNvSpPr txBox="1"/>
           <p:nvPr/>
         </p:nvSpPr>
@@ -15889,7 +17106,7 @@
       </p:sp>
       <p:sp>
         <p:nvSpPr>
-          <p:cNvPr id="37" name="TextBox 36"/>
+          <p:cNvPr id="38" name="TextBox 37"/>
           <p:cNvSpPr txBox="1"/>
           <p:nvPr/>
         </p:nvSpPr>
@@ -15924,14 +17141,14 @@
               <a:rPr>
                 <a:latin typeface="Inter"/>
               </a:rPr>
-              <a:t>Confidential — prepared for internal investment use · Data as of 2026-06-30</a:t>
-            </a:r>
-          </a:p>
-        </p:txBody>
-      </p:sp>
-      <p:sp>
-        <p:nvSpPr>
-          <p:cNvPr id="38" name="TextBox 37"/>
+              <a:t>Confidential — Investment Committee · Data as of 2026-06-30</a:t>
+            </a:r>
+          </a:p>
+        </p:txBody>
+      </p:sp>
+      <p:sp>
+        <p:nvSpPr>
+          <p:cNvPr id="39" name="TextBox 38"/>
           <p:cNvSpPr txBox="1"/>
           <p:nvPr/>
         </p:nvSpPr>
@@ -16047,7 +17264,7 @@
         <p:spPr>
           <a:xfrm>
             <a:off x="640080" y="329184"/>
-            <a:ext cx="9875520" cy="182880"/>
+            <a:ext cx="5303520" cy="182880"/>
           </a:xfrm>
           <a:prstGeom prst="rect">
             <a:avLst/>
@@ -16088,6 +17305,48 @@
         </p:nvSpPr>
         <p:spPr>
           <a:xfrm>
+            <a:off x="5897880" y="310896"/>
+            <a:ext cx="4800600" cy="256032"/>
+          </a:xfrm>
+          <a:prstGeom prst="rect">
+            <a:avLst/>
+          </a:prstGeom>
+          <a:noFill/>
+        </p:spPr>
+        <p:txBody>
+          <a:bodyPr wrap="none" lIns="9144" rIns="9144" tIns="9144" bIns="9144" anchor="t">
+            <a:spAutoFit/>
+          </a:bodyPr>
+          <a:lstStyle/>
+          <a:p>
+            <a:pPr algn="r">
+              <a:spcAft>
+                <a:spcPts val="0"/>
+              </a:spcAft>
+              <a:defRPr sz="680" b="1">
+                <a:solidFill>
+                  <a:srgbClr val="4F6B00"/>
+                </a:solidFill>
+                <a:latin typeface="Inter"/>
+              </a:defRPr>
+            </a:pPr>
+            <a:r>
+              <a:rPr>
+                <a:latin typeface="Inter"/>
+              </a:rPr>
+              <a:t>Illustrative, Gradient Maintained — demo data, not the client's holdings or managers</a:t>
+            </a:r>
+          </a:p>
+        </p:txBody>
+      </p:sp>
+      <p:sp>
+        <p:nvSpPr>
+          <p:cNvPr id="5" name="TextBox 4"/>
+          <p:cNvSpPr txBox="1"/>
+          <p:nvPr/>
+        </p:nvSpPr>
+        <p:spPr>
+          <a:xfrm>
             <a:off x="640080" y="566928"/>
             <a:ext cx="10058400" cy="530352"/>
           </a:xfrm>
@@ -16124,7 +17383,7 @@
       </p:sp>
       <p:sp>
         <p:nvSpPr>
-          <p:cNvPr id="5" name="Rectangle 4"/>
+          <p:cNvPr id="6" name="Rectangle 5"/>
           <p:cNvSpPr/>
           <p:nvPr/>
         </p:nvSpPr>
@@ -16173,7 +17432,7 @@
       </p:sp>
       <p:sp>
         <p:nvSpPr>
-          <p:cNvPr id="6" name="Rectangle 5"/>
+          <p:cNvPr id="7" name="Rectangle 6"/>
           <p:cNvSpPr/>
           <p:nvPr/>
         </p:nvSpPr>
@@ -16222,7 +17481,7 @@
       </p:sp>
       <p:sp>
         <p:nvSpPr>
-          <p:cNvPr id="7" name="TextBox 6"/>
+          <p:cNvPr id="8" name="TextBox 7"/>
           <p:cNvSpPr txBox="1"/>
           <p:nvPr/>
         </p:nvSpPr>
@@ -16264,7 +17523,7 @@
       </p:sp>
       <p:sp>
         <p:nvSpPr>
-          <p:cNvPr id="8" name="TextBox 7"/>
+          <p:cNvPr id="9" name="TextBox 8"/>
           <p:cNvSpPr txBox="1"/>
           <p:nvPr/>
         </p:nvSpPr>
@@ -16306,7 +17565,7 @@
       </p:sp>
       <p:graphicFrame>
         <p:nvGraphicFramePr>
-          <p:cNvPr id="9" name="Chart 8"/>
+          <p:cNvPr id="10" name="Chart 9"/>
           <p:cNvGraphicFramePr>
             <a:graphicFrameLocks noGrp="1"/>
           </p:cNvGraphicFramePr>
@@ -16324,7 +17583,7 @@
       </p:graphicFrame>
       <p:sp>
         <p:nvSpPr>
-          <p:cNvPr id="10" name="Rectangle 9"/>
+          <p:cNvPr id="11" name="Rectangle 10"/>
           <p:cNvSpPr/>
           <p:nvPr/>
         </p:nvSpPr>
@@ -16373,7 +17632,7 @@
       </p:sp>
       <p:sp>
         <p:nvSpPr>
-          <p:cNvPr id="11" name="TextBox 10"/>
+          <p:cNvPr id="12" name="TextBox 11"/>
           <p:cNvSpPr txBox="1"/>
           <p:nvPr/>
         </p:nvSpPr>
@@ -16415,7 +17674,7 @@
       </p:sp>
       <p:sp>
         <p:nvSpPr>
-          <p:cNvPr id="12" name="TextBox 11"/>
+          <p:cNvPr id="13" name="TextBox 12"/>
           <p:cNvSpPr txBox="1"/>
           <p:nvPr/>
         </p:nvSpPr>
@@ -16450,14 +17709,14 @@
               <a:rPr>
                 <a:latin typeface="Inter"/>
               </a:rPr>
-              <a:t>Confidential — prepared for internal investment use · Data as of 2026-06-30</a:t>
-            </a:r>
-          </a:p>
-        </p:txBody>
-      </p:sp>
-      <p:sp>
-        <p:nvSpPr>
-          <p:cNvPr id="13" name="TextBox 12"/>
+              <a:t>Confidential — Investment Committee · Data as of 2026-06-30</a:t>
+            </a:r>
+          </a:p>
+        </p:txBody>
+      </p:sp>
+      <p:sp>
+        <p:nvSpPr>
+          <p:cNvPr id="14" name="TextBox 13"/>
           <p:cNvSpPr txBox="1"/>
           <p:nvPr/>
         </p:nvSpPr>
@@ -16573,7 +17832,7 @@
         <p:spPr>
           <a:xfrm>
             <a:off x="640080" y="329184"/>
-            <a:ext cx="9875520" cy="182880"/>
+            <a:ext cx="5303520" cy="182880"/>
           </a:xfrm>
           <a:prstGeom prst="rect">
             <a:avLst/>
@@ -16614,6 +17873,48 @@
         </p:nvSpPr>
         <p:spPr>
           <a:xfrm>
+            <a:off x="5897880" y="310896"/>
+            <a:ext cx="4800600" cy="256032"/>
+          </a:xfrm>
+          <a:prstGeom prst="rect">
+            <a:avLst/>
+          </a:prstGeom>
+          <a:noFill/>
+        </p:spPr>
+        <p:txBody>
+          <a:bodyPr wrap="none" lIns="9144" rIns="9144" tIns="9144" bIns="9144" anchor="t">
+            <a:spAutoFit/>
+          </a:bodyPr>
+          <a:lstStyle/>
+          <a:p>
+            <a:pPr algn="r">
+              <a:spcAft>
+                <a:spcPts val="0"/>
+              </a:spcAft>
+              <a:defRPr sz="680" b="1">
+                <a:solidFill>
+                  <a:srgbClr val="4F6B00"/>
+                </a:solidFill>
+                <a:latin typeface="Inter"/>
+              </a:defRPr>
+            </a:pPr>
+            <a:r>
+              <a:rPr>
+                <a:latin typeface="Inter"/>
+              </a:rPr>
+              <a:t>Illustrative, Gradient Maintained — demo data, not the client's holdings or managers</a:t>
+            </a:r>
+          </a:p>
+        </p:txBody>
+      </p:sp>
+      <p:sp>
+        <p:nvSpPr>
+          <p:cNvPr id="5" name="TextBox 4"/>
+          <p:cNvSpPr txBox="1"/>
+          <p:nvPr/>
+        </p:nvSpPr>
+        <p:spPr>
+          <a:xfrm>
             <a:off x="640080" y="566928"/>
             <a:ext cx="10058400" cy="530352"/>
           </a:xfrm>
@@ -16650,7 +17951,7 @@
       </p:sp>
       <p:sp>
         <p:nvSpPr>
-          <p:cNvPr id="5" name="Rectangle 4"/>
+          <p:cNvPr id="6" name="Rectangle 5"/>
           <p:cNvSpPr/>
           <p:nvPr/>
         </p:nvSpPr>
@@ -16699,7 +18000,7 @@
       </p:sp>
       <p:sp>
         <p:nvSpPr>
-          <p:cNvPr id="6" name="Rectangle 5"/>
+          <p:cNvPr id="7" name="Rectangle 6"/>
           <p:cNvSpPr/>
           <p:nvPr/>
         </p:nvSpPr>
@@ -16748,7 +18049,7 @@
       </p:sp>
       <p:sp>
         <p:nvSpPr>
-          <p:cNvPr id="7" name="TextBox 6"/>
+          <p:cNvPr id="8" name="TextBox 7"/>
           <p:cNvSpPr txBox="1"/>
           <p:nvPr/>
         </p:nvSpPr>
@@ -16790,7 +18091,7 @@
       </p:sp>
       <p:sp>
         <p:nvSpPr>
-          <p:cNvPr id="8" name="TextBox 7"/>
+          <p:cNvPr id="9" name="TextBox 8"/>
           <p:cNvSpPr txBox="1"/>
           <p:nvPr/>
         </p:nvSpPr>
@@ -16832,7 +18133,7 @@
       </p:sp>
       <p:graphicFrame>
         <p:nvGraphicFramePr>
-          <p:cNvPr id="9" name="Chart 8"/>
+          <p:cNvPr id="10" name="Chart 9"/>
           <p:cNvGraphicFramePr>
             <a:graphicFrameLocks noGrp="1"/>
           </p:cNvGraphicFramePr>
@@ -16850,7 +18151,7 @@
       </p:graphicFrame>
       <p:sp>
         <p:nvSpPr>
-          <p:cNvPr id="10" name="Rectangle 9"/>
+          <p:cNvPr id="11" name="Rectangle 10"/>
           <p:cNvSpPr/>
           <p:nvPr/>
         </p:nvSpPr>
@@ -16899,7 +18200,7 @@
       </p:sp>
       <p:sp>
         <p:nvSpPr>
-          <p:cNvPr id="11" name="TextBox 10"/>
+          <p:cNvPr id="12" name="TextBox 11"/>
           <p:cNvSpPr txBox="1"/>
           <p:nvPr/>
         </p:nvSpPr>
@@ -16941,7 +18242,7 @@
       </p:sp>
       <p:sp>
         <p:nvSpPr>
-          <p:cNvPr id="12" name="TextBox 11"/>
+          <p:cNvPr id="13" name="TextBox 12"/>
           <p:cNvSpPr txBox="1"/>
           <p:nvPr/>
         </p:nvSpPr>
@@ -16976,14 +18277,14 @@
               <a:rPr>
                 <a:latin typeface="Inter"/>
               </a:rPr>
-              <a:t>Confidential — prepared for internal investment use · Data as of 2026-06-30</a:t>
-            </a:r>
-          </a:p>
-        </p:txBody>
-      </p:sp>
-      <p:sp>
-        <p:nvSpPr>
-          <p:cNvPr id="13" name="TextBox 12"/>
+              <a:t>Confidential — Investment Committee · Data as of 2026-06-30</a:t>
+            </a:r>
+          </a:p>
+        </p:txBody>
+      </p:sp>
+      <p:sp>
+        <p:nvSpPr>
+          <p:cNvPr id="14" name="TextBox 13"/>
           <p:cNvSpPr txBox="1"/>
           <p:nvPr/>
         </p:nvSpPr>
@@ -17099,7 +18400,7 @@
         <p:spPr>
           <a:xfrm>
             <a:off x="640080" y="329184"/>
-            <a:ext cx="9875520" cy="182880"/>
+            <a:ext cx="5303520" cy="182880"/>
           </a:xfrm>
           <a:prstGeom prst="rect">
             <a:avLst/>
@@ -17140,6 +18441,48 @@
         </p:nvSpPr>
         <p:spPr>
           <a:xfrm>
+            <a:off x="5897880" y="310896"/>
+            <a:ext cx="4800600" cy="256032"/>
+          </a:xfrm>
+          <a:prstGeom prst="rect">
+            <a:avLst/>
+          </a:prstGeom>
+          <a:noFill/>
+        </p:spPr>
+        <p:txBody>
+          <a:bodyPr wrap="none" lIns="9144" rIns="9144" tIns="9144" bIns="9144" anchor="t">
+            <a:spAutoFit/>
+          </a:bodyPr>
+          <a:lstStyle/>
+          <a:p>
+            <a:pPr algn="r">
+              <a:spcAft>
+                <a:spcPts val="0"/>
+              </a:spcAft>
+              <a:defRPr sz="680" b="1">
+                <a:solidFill>
+                  <a:srgbClr val="4F6B00"/>
+                </a:solidFill>
+                <a:latin typeface="Inter"/>
+              </a:defRPr>
+            </a:pPr>
+            <a:r>
+              <a:rPr>
+                <a:latin typeface="Inter"/>
+              </a:rPr>
+              <a:t>Illustrative, Gradient Maintained — demo data, not the client's holdings or managers</a:t>
+            </a:r>
+          </a:p>
+        </p:txBody>
+      </p:sp>
+      <p:sp>
+        <p:nvSpPr>
+          <p:cNvPr id="5" name="TextBox 4"/>
+          <p:cNvSpPr txBox="1"/>
+          <p:nvPr/>
+        </p:nvSpPr>
+        <p:spPr>
+          <a:xfrm>
             <a:off x="640080" y="566928"/>
             <a:ext cx="10058400" cy="530352"/>
           </a:xfrm>
@@ -17176,7 +18519,7 @@
       </p:sp>
       <p:sp>
         <p:nvSpPr>
-          <p:cNvPr id="5" name="Rectangle 4"/>
+          <p:cNvPr id="6" name="Rectangle 5"/>
           <p:cNvSpPr/>
           <p:nvPr/>
         </p:nvSpPr>
@@ -17225,7 +18568,7 @@
       </p:sp>
       <p:sp>
         <p:nvSpPr>
-          <p:cNvPr id="6" name="Rectangle 5"/>
+          <p:cNvPr id="7" name="Rectangle 6"/>
           <p:cNvSpPr/>
           <p:nvPr/>
         </p:nvSpPr>
@@ -17274,7 +18617,7 @@
       </p:sp>
       <p:sp>
         <p:nvSpPr>
-          <p:cNvPr id="7" name="TextBox 6"/>
+          <p:cNvPr id="8" name="TextBox 7"/>
           <p:cNvSpPr txBox="1"/>
           <p:nvPr/>
         </p:nvSpPr>
@@ -17316,7 +18659,7 @@
       </p:sp>
       <p:sp>
         <p:nvSpPr>
-          <p:cNvPr id="8" name="TextBox 7"/>
+          <p:cNvPr id="9" name="TextBox 8"/>
           <p:cNvSpPr txBox="1"/>
           <p:nvPr/>
         </p:nvSpPr>
@@ -17358,7 +18701,7 @@
       </p:sp>
       <p:graphicFrame>
         <p:nvGraphicFramePr>
-          <p:cNvPr id="9" name="Table 8"/>
+          <p:cNvPr id="10" name="Table 9"/>
           <p:cNvGraphicFramePr>
             <a:graphicFrameLocks noGrp="1"/>
           </p:cNvGraphicFramePr>
@@ -17717,7 +19060,7 @@
       </p:graphicFrame>
       <p:sp>
         <p:nvSpPr>
-          <p:cNvPr id="10" name="TextBox 9"/>
+          <p:cNvPr id="11" name="TextBox 10"/>
           <p:cNvSpPr txBox="1"/>
           <p:nvPr/>
         </p:nvSpPr>
@@ -17759,7 +19102,7 @@
       </p:sp>
       <p:sp>
         <p:nvSpPr>
-          <p:cNvPr id="11" name="Rectangle 10"/>
+          <p:cNvPr id="12" name="Rectangle 11"/>
           <p:cNvSpPr/>
           <p:nvPr/>
         </p:nvSpPr>
@@ -17808,7 +19151,7 @@
       </p:sp>
       <p:sp>
         <p:nvSpPr>
-          <p:cNvPr id="12" name="Rectangle 11"/>
+          <p:cNvPr id="13" name="Rectangle 12"/>
           <p:cNvSpPr/>
           <p:nvPr/>
         </p:nvSpPr>
@@ -17857,7 +19200,7 @@
       </p:sp>
       <p:sp>
         <p:nvSpPr>
-          <p:cNvPr id="13" name="TextBox 12"/>
+          <p:cNvPr id="14" name="TextBox 13"/>
           <p:cNvSpPr txBox="1"/>
           <p:nvPr/>
         </p:nvSpPr>
@@ -17899,7 +19242,7 @@
       </p:sp>
       <p:sp>
         <p:nvSpPr>
-          <p:cNvPr id="14" name="TextBox 13"/>
+          <p:cNvPr id="15" name="TextBox 14"/>
           <p:cNvSpPr txBox="1"/>
           <p:nvPr/>
         </p:nvSpPr>
@@ -17941,7 +19284,7 @@
       </p:sp>
       <p:sp>
         <p:nvSpPr>
-          <p:cNvPr id="15" name="Rectangle 14"/>
+          <p:cNvPr id="16" name="Rectangle 15"/>
           <p:cNvSpPr/>
           <p:nvPr/>
         </p:nvSpPr>
@@ -17990,7 +19333,7 @@
       </p:sp>
       <p:sp>
         <p:nvSpPr>
-          <p:cNvPr id="16" name="TextBox 15"/>
+          <p:cNvPr id="17" name="TextBox 16"/>
           <p:cNvSpPr txBox="1"/>
           <p:nvPr/>
         </p:nvSpPr>
@@ -18032,7 +19375,7 @@
       </p:sp>
       <p:sp>
         <p:nvSpPr>
-          <p:cNvPr id="17" name="TextBox 16"/>
+          <p:cNvPr id="18" name="TextBox 17"/>
           <p:cNvSpPr txBox="1"/>
           <p:nvPr/>
         </p:nvSpPr>
@@ -18067,14 +19410,14 @@
               <a:rPr>
                 <a:latin typeface="Inter"/>
               </a:rPr>
-              <a:t>Confidential — prepared for internal investment use · Data as of 2026-06-30</a:t>
-            </a:r>
-          </a:p>
-        </p:txBody>
-      </p:sp>
-      <p:sp>
-        <p:nvSpPr>
-          <p:cNvPr id="18" name="TextBox 17"/>
+              <a:t>Confidential — Investment Committee · Data as of 2026-06-30</a:t>
+            </a:r>
+          </a:p>
+        </p:txBody>
+      </p:sp>
+      <p:sp>
+        <p:nvSpPr>
+          <p:cNvPr id="19" name="TextBox 18"/>
           <p:cNvSpPr txBox="1"/>
           <p:nvPr/>
         </p:nvSpPr>
@@ -18190,7 +19533,7 @@
         <p:spPr>
           <a:xfrm>
             <a:off x="640080" y="329184"/>
-            <a:ext cx="9875520" cy="182880"/>
+            <a:ext cx="5303520" cy="182880"/>
           </a:xfrm>
           <a:prstGeom prst="rect">
             <a:avLst/>
@@ -18231,6 +19574,48 @@
         </p:nvSpPr>
         <p:spPr>
           <a:xfrm>
+            <a:off x="5897880" y="310896"/>
+            <a:ext cx="4800600" cy="256032"/>
+          </a:xfrm>
+          <a:prstGeom prst="rect">
+            <a:avLst/>
+          </a:prstGeom>
+          <a:noFill/>
+        </p:spPr>
+        <p:txBody>
+          <a:bodyPr wrap="none" lIns="9144" rIns="9144" tIns="9144" bIns="9144" anchor="t">
+            <a:spAutoFit/>
+          </a:bodyPr>
+          <a:lstStyle/>
+          <a:p>
+            <a:pPr algn="r">
+              <a:spcAft>
+                <a:spcPts val="0"/>
+              </a:spcAft>
+              <a:defRPr sz="680" b="1">
+                <a:solidFill>
+                  <a:srgbClr val="4F6B00"/>
+                </a:solidFill>
+                <a:latin typeface="Inter"/>
+              </a:defRPr>
+            </a:pPr>
+            <a:r>
+              <a:rPr>
+                <a:latin typeface="Inter"/>
+              </a:rPr>
+              <a:t>Illustrative, Gradient Maintained — demo data, not the client's holdings or managers</a:t>
+            </a:r>
+          </a:p>
+        </p:txBody>
+      </p:sp>
+      <p:sp>
+        <p:nvSpPr>
+          <p:cNvPr id="5" name="TextBox 4"/>
+          <p:cNvSpPr txBox="1"/>
+          <p:nvPr/>
+        </p:nvSpPr>
+        <p:spPr>
+          <a:xfrm>
             <a:off x="640080" y="566928"/>
             <a:ext cx="10058400" cy="530352"/>
           </a:xfrm>
@@ -18267,7 +19652,7 @@
       </p:sp>
       <p:sp>
         <p:nvSpPr>
-          <p:cNvPr id="5" name="Rectangle 4"/>
+          <p:cNvPr id="6" name="Rectangle 5"/>
           <p:cNvSpPr/>
           <p:nvPr/>
         </p:nvSpPr>
@@ -18316,7 +19701,7 @@
       </p:sp>
       <p:sp>
         <p:nvSpPr>
-          <p:cNvPr id="6" name="Rectangle 5"/>
+          <p:cNvPr id="7" name="Rectangle 6"/>
           <p:cNvSpPr/>
           <p:nvPr/>
         </p:nvSpPr>
@@ -18365,7 +19750,7 @@
       </p:sp>
       <p:sp>
         <p:nvSpPr>
-          <p:cNvPr id="7" name="TextBox 6"/>
+          <p:cNvPr id="8" name="TextBox 7"/>
           <p:cNvSpPr txBox="1"/>
           <p:nvPr/>
         </p:nvSpPr>
@@ -18407,7 +19792,7 @@
       </p:sp>
       <p:graphicFrame>
         <p:nvGraphicFramePr>
-          <p:cNvPr id="8" name="Table 7"/>
+          <p:cNvPr id="9" name="Table 8"/>
           <p:cNvGraphicFramePr>
             <a:graphicFrameLocks noGrp="1"/>
           </p:cNvGraphicFramePr>
@@ -18766,7 +20151,7 @@
       </p:graphicFrame>
       <p:sp>
         <p:nvSpPr>
-          <p:cNvPr id="9" name="Rectangle 8"/>
+          <p:cNvPr id="10" name="Rectangle 9"/>
           <p:cNvSpPr/>
           <p:nvPr/>
         </p:nvSpPr>
@@ -18815,7 +20200,7 @@
       </p:sp>
       <p:sp>
         <p:nvSpPr>
-          <p:cNvPr id="10" name="TextBox 9"/>
+          <p:cNvPr id="11" name="TextBox 10"/>
           <p:cNvSpPr txBox="1"/>
           <p:nvPr/>
         </p:nvSpPr>
@@ -18857,7 +20242,7 @@
       </p:sp>
       <p:sp>
         <p:nvSpPr>
-          <p:cNvPr id="11" name="TextBox 10"/>
+          <p:cNvPr id="12" name="TextBox 11"/>
           <p:cNvSpPr txBox="1"/>
           <p:nvPr/>
         </p:nvSpPr>
@@ -18892,14 +20277,14 @@
               <a:rPr>
                 <a:latin typeface="Inter"/>
               </a:rPr>
-              <a:t>Confidential — prepared for internal investment use · Data as of 2026-06-30</a:t>
-            </a:r>
-          </a:p>
-        </p:txBody>
-      </p:sp>
-      <p:sp>
-        <p:nvSpPr>
-          <p:cNvPr id="12" name="TextBox 11"/>
+              <a:t>Confidential — Investment Committee · Data as of 2026-06-30</a:t>
+            </a:r>
+          </a:p>
+        </p:txBody>
+      </p:sp>
+      <p:sp>
+        <p:nvSpPr>
+          <p:cNvPr id="13" name="TextBox 12"/>
           <p:cNvSpPr txBox="1"/>
           <p:nvPr/>
         </p:nvSpPr>
@@ -19015,7 +20400,7 @@
         <p:spPr>
           <a:xfrm>
             <a:off x="640080" y="329184"/>
-            <a:ext cx="9875520" cy="182880"/>
+            <a:ext cx="5303520" cy="182880"/>
           </a:xfrm>
           <a:prstGeom prst="rect">
             <a:avLst/>
@@ -19056,6 +20441,48 @@
         </p:nvSpPr>
         <p:spPr>
           <a:xfrm>
+            <a:off x="5897880" y="310896"/>
+            <a:ext cx="4800600" cy="256032"/>
+          </a:xfrm>
+          <a:prstGeom prst="rect">
+            <a:avLst/>
+          </a:prstGeom>
+          <a:noFill/>
+        </p:spPr>
+        <p:txBody>
+          <a:bodyPr wrap="none" lIns="9144" rIns="9144" tIns="9144" bIns="9144" anchor="t">
+            <a:spAutoFit/>
+          </a:bodyPr>
+          <a:lstStyle/>
+          <a:p>
+            <a:pPr algn="r">
+              <a:spcAft>
+                <a:spcPts val="0"/>
+              </a:spcAft>
+              <a:defRPr sz="680" b="1">
+                <a:solidFill>
+                  <a:srgbClr val="4F6B00"/>
+                </a:solidFill>
+                <a:latin typeface="Inter"/>
+              </a:defRPr>
+            </a:pPr>
+            <a:r>
+              <a:rPr>
+                <a:latin typeface="Inter"/>
+              </a:rPr>
+              <a:t>Illustrative, Gradient Maintained — demo data, not the client's holdings or managers</a:t>
+            </a:r>
+          </a:p>
+        </p:txBody>
+      </p:sp>
+      <p:sp>
+        <p:nvSpPr>
+          <p:cNvPr id="5" name="TextBox 4"/>
+          <p:cNvSpPr txBox="1"/>
+          <p:nvPr/>
+        </p:nvSpPr>
+        <p:spPr>
+          <a:xfrm>
             <a:off x="640080" y="566928"/>
             <a:ext cx="10058400" cy="530352"/>
           </a:xfrm>
@@ -19092,7 +20519,7 @@
       </p:sp>
       <p:sp>
         <p:nvSpPr>
-          <p:cNvPr id="5" name="Rectangle 4"/>
+          <p:cNvPr id="6" name="Rectangle 5"/>
           <p:cNvSpPr/>
           <p:nvPr/>
         </p:nvSpPr>
@@ -19141,7 +20568,7 @@
       </p:sp>
       <p:sp>
         <p:nvSpPr>
-          <p:cNvPr id="6" name="Rectangle 5"/>
+          <p:cNvPr id="7" name="Rectangle 6"/>
           <p:cNvSpPr/>
           <p:nvPr/>
         </p:nvSpPr>
@@ -19190,7 +20617,7 @@
       </p:sp>
       <p:sp>
         <p:nvSpPr>
-          <p:cNvPr id="7" name="TextBox 6"/>
+          <p:cNvPr id="8" name="TextBox 7"/>
           <p:cNvSpPr txBox="1"/>
           <p:nvPr/>
         </p:nvSpPr>
@@ -19232,7 +20659,7 @@
       </p:sp>
       <p:graphicFrame>
         <p:nvGraphicFramePr>
-          <p:cNvPr id="8" name="Table 7"/>
+          <p:cNvPr id="9" name="Table 8"/>
           <p:cNvGraphicFramePr>
             <a:graphicFrameLocks noGrp="1"/>
           </p:cNvGraphicFramePr>
@@ -19240,7 +20667,7 @@
         </p:nvGraphicFramePr>
         <p:xfrm>
           <a:off x="640080" y="1325880"/>
-          <a:ext cx="10908792" cy="4892040"/>
+          <a:ext cx="10908792" cy="4690872"/>
         </p:xfrm>
         <a:graphic>
           <a:graphicData uri="http://schemas.openxmlformats.org/drawingml/2006/table">
@@ -19259,7 +20686,7 @@
                 <a:gridCol w="1112139"/>
                 <a:gridCol w="1112139"/>
               </a:tblGrid>
-              <a:tr h="698862">
+              <a:tr h="670124">
                 <a:tc>
                   <a:txBody>
                     <a:bodyPr/>
@@ -19504,7 +20931,7 @@
                   </a:tcPr>
                 </a:tc>
               </a:tr>
-              <a:tr h="698862">
+              <a:tr h="670124">
                 <a:tc>
                   <a:txBody>
                     <a:bodyPr/>
@@ -19630,7 +21057,7 @@
                         <a:rPr>
                           <a:latin typeface="Inter"/>
                         </a:rPr>
-                        <a:t>fixture=true</a:t>
+                        <a:t>illustrative sample</a:t>
                       </a:r>
                     </a:p>
                   </a:txBody>
@@ -19684,7 +21111,7 @@
                         <a:rPr>
                           <a:latin typeface="Inter"/>
                         </a:rPr>
-                        <a:t>Gradient-governed TEST evidence</a:t>
+                        <a:t>Gradient-governed review evidence</a:t>
                       </a:r>
                     </a:p>
                   </a:txBody>
@@ -19749,7 +21176,7 @@
                   </a:tcPr>
                 </a:tc>
               </a:tr>
-              <a:tr h="698862">
+              <a:tr h="670124">
                 <a:tc>
                   <a:txBody>
                     <a:bodyPr/>
@@ -19875,7 +21302,7 @@
                         <a:rPr>
                           <a:latin typeface="Inter"/>
                         </a:rPr>
-                        <a:t>fixture=true</a:t>
+                        <a:t>illustrative sample</a:t>
                       </a:r>
                     </a:p>
                   </a:txBody>
@@ -19929,7 +21356,7 @@
                         <a:rPr>
                           <a:latin typeface="Inter"/>
                         </a:rPr>
-                        <a:t>Gradient-governed TEST evidence</a:t>
+                        <a:t>Gradient-governed review evidence</a:t>
                       </a:r>
                     </a:p>
                   </a:txBody>
@@ -19994,7 +21421,7 @@
                   </a:tcPr>
                 </a:tc>
               </a:tr>
-              <a:tr h="698862">
+              <a:tr h="670124">
                 <a:tc>
                   <a:txBody>
                     <a:bodyPr/>
@@ -20120,7 +21547,7 @@
                         <a:rPr>
                           <a:latin typeface="Inter"/>
                         </a:rPr>
-                        <a:t>fixture=true</a:t>
+                        <a:t>illustrative sample</a:t>
                       </a:r>
                     </a:p>
                   </a:txBody>
@@ -20174,7 +21601,7 @@
                         <a:rPr>
                           <a:latin typeface="Inter"/>
                         </a:rPr>
-                        <a:t>Gradient-governed TEST evidence</a:t>
+                        <a:t>Gradient-governed review evidence</a:t>
                       </a:r>
                     </a:p>
                   </a:txBody>
@@ -20239,7 +21666,7 @@
                   </a:tcPr>
                 </a:tc>
               </a:tr>
-              <a:tr h="698862">
+              <a:tr h="670124">
                 <a:tc>
                   <a:txBody>
                     <a:bodyPr/>
@@ -20365,7 +21792,7 @@
                         <a:rPr>
                           <a:latin typeface="Inter"/>
                         </a:rPr>
-                        <a:t>fixture=true</a:t>
+                        <a:t>illustrative sample</a:t>
                       </a:r>
                     </a:p>
                   </a:txBody>
@@ -20419,7 +21846,7 @@
                         <a:rPr>
                           <a:latin typeface="Inter"/>
                         </a:rPr>
-                        <a:t>Gradient-governed TEST evidence</a:t>
+                        <a:t>Gradient-governed review evidence</a:t>
                       </a:r>
                     </a:p>
                   </a:txBody>
@@ -20484,7 +21911,7 @@
                   </a:tcPr>
                 </a:tc>
               </a:tr>
-              <a:tr h="698862">
+              <a:tr h="670124">
                 <a:tc>
                   <a:txBody>
                     <a:bodyPr/>
@@ -20610,7 +22037,7 @@
                         <a:rPr>
                           <a:latin typeface="Inter"/>
                         </a:rPr>
-                        <a:t>fixture=true</a:t>
+                        <a:t>illustrative sample</a:t>
                       </a:r>
                     </a:p>
                   </a:txBody>
@@ -20664,7 +22091,7 @@
                         <a:rPr>
                           <a:latin typeface="Inter"/>
                         </a:rPr>
-                        <a:t>Gradient-governed TEST evidence</a:t>
+                        <a:t>Gradient-governed review evidence</a:t>
                       </a:r>
                     </a:p>
                   </a:txBody>
@@ -20729,7 +22156,7 @@
                   </a:tcPr>
                 </a:tc>
               </a:tr>
-              <a:tr h="698868">
+              <a:tr h="670128">
                 <a:tc>
                   <a:txBody>
                     <a:bodyPr/>
@@ -20855,7 +22282,7 @@
                         <a:rPr>
                           <a:latin typeface="Inter"/>
                         </a:rPr>
-                        <a:t>fields=cumulative_growth; limit=100; fixture=true</a:t>
+                        <a:t>fields=cumulative_growth; limit=100; illustrative sample</a:t>
                       </a:r>
                     </a:p>
                   </a:txBody>
@@ -20909,7 +22336,7 @@
                         <a:rPr>
                           <a:latin typeface="Inter"/>
                         </a:rPr>
-                        <a:t>Gradient-governed TEST evidence</a:t>
+                        <a:t>Gradient-governed review evidence</a:t>
                       </a:r>
                     </a:p>
                   </a:txBody>
@@ -20980,7 +22407,49 @@
       </p:graphicFrame>
       <p:sp>
         <p:nvSpPr>
-          <p:cNvPr id="9" name="Rectangle 8"/>
+          <p:cNvPr id="10" name="TextBox 9"/>
+          <p:cNvSpPr txBox="1"/>
+          <p:nvPr/>
+        </p:nvSpPr>
+        <p:spPr>
+          <a:xfrm>
+            <a:off x="640080" y="6035040"/>
+            <a:ext cx="10908792" cy="164592"/>
+          </a:xfrm>
+          <a:prstGeom prst="rect">
+            <a:avLst/>
+          </a:prstGeom>
+          <a:noFill/>
+        </p:spPr>
+        <p:txBody>
+          <a:bodyPr wrap="none" lIns="9144" rIns="9144" tIns="9144" bIns="9144" anchor="t">
+            <a:spAutoFit/>
+          </a:bodyPr>
+          <a:lstStyle/>
+          <a:p>
+            <a:pPr algn="l">
+              <a:spcAft>
+                <a:spcPts val="0"/>
+              </a:spcAft>
+              <a:defRPr sz="680" b="0">
+                <a:solidFill>
+                  <a:srgbClr val="8A94A1"/>
+                </a:solidFill>
+                <a:latin typeface="Inter"/>
+              </a:defRPr>
+            </a:pPr>
+            <a:r>
+              <a:rPr>
+                <a:latin typeface="Inter"/>
+              </a:rPr>
+              <a:t>Illustrative, Gradient Maintained — demo data, not the client's holdings or managers. All organizations, portfolios, managers and results in this public example are illustrative.</a:t>
+            </a:r>
+          </a:p>
+        </p:txBody>
+      </p:sp>
+      <p:sp>
+        <p:nvSpPr>
+          <p:cNvPr id="11" name="Rectangle 10"/>
           <p:cNvSpPr/>
           <p:nvPr/>
         </p:nvSpPr>
@@ -21029,7 +22498,7 @@
       </p:sp>
       <p:sp>
         <p:nvSpPr>
-          <p:cNvPr id="10" name="TextBox 9"/>
+          <p:cNvPr id="12" name="TextBox 11"/>
           <p:cNvSpPr txBox="1"/>
           <p:nvPr/>
         </p:nvSpPr>
@@ -21071,7 +22540,7 @@
       </p:sp>
       <p:sp>
         <p:nvSpPr>
-          <p:cNvPr id="11" name="TextBox 10"/>
+          <p:cNvPr id="13" name="TextBox 12"/>
           <p:cNvSpPr txBox="1"/>
           <p:nvPr/>
         </p:nvSpPr>
@@ -21106,14 +22575,14 @@
               <a:rPr>
                 <a:latin typeface="Inter"/>
               </a:rPr>
-              <a:t>Confidential — prepared for internal investment use · Data as of 2026-06-30</a:t>
-            </a:r>
-          </a:p>
-        </p:txBody>
-      </p:sp>
-      <p:sp>
-        <p:nvSpPr>
-          <p:cNvPr id="12" name="TextBox 11"/>
+              <a:t>Confidential — Investment Committee · Data as of 2026-06-30</a:t>
+            </a:r>
+          </a:p>
+        </p:txBody>
+      </p:sp>
+      <p:sp>
+        <p:nvSpPr>
+          <p:cNvPr id="14" name="TextBox 13"/>
           <p:cNvSpPr txBox="1"/>
           <p:nvPr/>
         </p:nvSpPr>
@@ -21229,7 +22698,7 @@
         <p:spPr>
           <a:xfrm>
             <a:off x="640080" y="329184"/>
-            <a:ext cx="9875520" cy="182880"/>
+            <a:ext cx="5303520" cy="182880"/>
           </a:xfrm>
           <a:prstGeom prst="rect">
             <a:avLst/>
@@ -21270,6 +22739,48 @@
         </p:nvSpPr>
         <p:spPr>
           <a:xfrm>
+            <a:off x="5897880" y="310896"/>
+            <a:ext cx="4800600" cy="256032"/>
+          </a:xfrm>
+          <a:prstGeom prst="rect">
+            <a:avLst/>
+          </a:prstGeom>
+          <a:noFill/>
+        </p:spPr>
+        <p:txBody>
+          <a:bodyPr wrap="none" lIns="9144" rIns="9144" tIns="9144" bIns="9144" anchor="t">
+            <a:spAutoFit/>
+          </a:bodyPr>
+          <a:lstStyle/>
+          <a:p>
+            <a:pPr algn="r">
+              <a:spcAft>
+                <a:spcPts val="0"/>
+              </a:spcAft>
+              <a:defRPr sz="680" b="1">
+                <a:solidFill>
+                  <a:srgbClr val="4F6B00"/>
+                </a:solidFill>
+                <a:latin typeface="Inter"/>
+              </a:defRPr>
+            </a:pPr>
+            <a:r>
+              <a:rPr>
+                <a:latin typeface="Inter"/>
+              </a:rPr>
+              <a:t>Illustrative, Gradient Maintained — demo data, not the client's holdings or managers</a:t>
+            </a:r>
+          </a:p>
+        </p:txBody>
+      </p:sp>
+      <p:sp>
+        <p:nvSpPr>
+          <p:cNvPr id="5" name="TextBox 4"/>
+          <p:cNvSpPr txBox="1"/>
+          <p:nvPr/>
+        </p:nvSpPr>
+        <p:spPr>
+          <a:xfrm>
             <a:off x="640080" y="566928"/>
             <a:ext cx="10058400" cy="530352"/>
           </a:xfrm>
@@ -21306,7 +22817,7 @@
       </p:sp>
       <p:sp>
         <p:nvSpPr>
-          <p:cNvPr id="5" name="Rectangle 4"/>
+          <p:cNvPr id="6" name="Rectangle 5"/>
           <p:cNvSpPr/>
           <p:nvPr/>
         </p:nvSpPr>
@@ -21355,7 +22866,7 @@
       </p:sp>
       <p:sp>
         <p:nvSpPr>
-          <p:cNvPr id="6" name="Rectangle 5"/>
+          <p:cNvPr id="7" name="Rectangle 6"/>
           <p:cNvSpPr/>
           <p:nvPr/>
         </p:nvSpPr>
@@ -21404,7 +22915,7 @@
       </p:sp>
       <p:sp>
         <p:nvSpPr>
-          <p:cNvPr id="7" name="TextBox 6"/>
+          <p:cNvPr id="8" name="TextBox 7"/>
           <p:cNvSpPr txBox="1"/>
           <p:nvPr/>
         </p:nvSpPr>
@@ -21446,7 +22957,7 @@
       </p:sp>
       <p:sp>
         <p:nvSpPr>
-          <p:cNvPr id="8" name="TextBox 7"/>
+          <p:cNvPr id="9" name="TextBox 8"/>
           <p:cNvSpPr txBox="1"/>
           <p:nvPr/>
         </p:nvSpPr>
@@ -21488,7 +22999,7 @@
       </p:sp>
       <p:graphicFrame>
         <p:nvGraphicFramePr>
-          <p:cNvPr id="9" name="Table 8"/>
+          <p:cNvPr id="10" name="Table 9"/>
           <p:cNvGraphicFramePr>
             <a:graphicFrameLocks noGrp="1"/>
           </p:cNvGraphicFramePr>
@@ -22476,7 +23987,7 @@
       </p:graphicFrame>
       <p:sp>
         <p:nvSpPr>
-          <p:cNvPr id="10" name="TextBox 9"/>
+          <p:cNvPr id="11" name="TextBox 10"/>
           <p:cNvSpPr txBox="1"/>
           <p:nvPr/>
         </p:nvSpPr>
@@ -22518,7 +24029,7 @@
       </p:sp>
       <p:sp>
         <p:nvSpPr>
-          <p:cNvPr id="11" name="Rectangle 10"/>
+          <p:cNvPr id="12" name="Rectangle 11"/>
           <p:cNvSpPr/>
           <p:nvPr/>
         </p:nvSpPr>
@@ -22567,7 +24078,7 @@
       </p:sp>
       <p:sp>
         <p:nvSpPr>
-          <p:cNvPr id="12" name="Rectangle 11"/>
+          <p:cNvPr id="13" name="Rectangle 12"/>
           <p:cNvSpPr/>
           <p:nvPr/>
         </p:nvSpPr>
@@ -22616,7 +24127,7 @@
       </p:sp>
       <p:sp>
         <p:nvSpPr>
-          <p:cNvPr id="13" name="TextBox 12"/>
+          <p:cNvPr id="14" name="TextBox 13"/>
           <p:cNvSpPr txBox="1"/>
           <p:nvPr/>
         </p:nvSpPr>
@@ -22658,7 +24169,7 @@
       </p:sp>
       <p:sp>
         <p:nvSpPr>
-          <p:cNvPr id="14" name="TextBox 13"/>
+          <p:cNvPr id="15" name="TextBox 14"/>
           <p:cNvSpPr txBox="1"/>
           <p:nvPr/>
         </p:nvSpPr>
@@ -22700,7 +24211,7 @@
       </p:sp>
       <p:sp>
         <p:nvSpPr>
-          <p:cNvPr id="15" name="Rectangle 14"/>
+          <p:cNvPr id="16" name="Rectangle 15"/>
           <p:cNvSpPr/>
           <p:nvPr/>
         </p:nvSpPr>
@@ -22749,7 +24260,7 @@
       </p:sp>
       <p:sp>
         <p:nvSpPr>
-          <p:cNvPr id="16" name="Rectangle 15"/>
+          <p:cNvPr id="17" name="Rectangle 16"/>
           <p:cNvSpPr/>
           <p:nvPr/>
         </p:nvSpPr>
@@ -22798,7 +24309,7 @@
       </p:sp>
       <p:sp>
         <p:nvSpPr>
-          <p:cNvPr id="17" name="TextBox 16"/>
+          <p:cNvPr id="18" name="TextBox 17"/>
           <p:cNvSpPr txBox="1"/>
           <p:nvPr/>
         </p:nvSpPr>
@@ -22840,7 +24351,7 @@
       </p:sp>
       <p:sp>
         <p:nvSpPr>
-          <p:cNvPr id="18" name="TextBox 17"/>
+          <p:cNvPr id="19" name="TextBox 18"/>
           <p:cNvSpPr txBox="1"/>
           <p:nvPr/>
         </p:nvSpPr>
@@ -22882,7 +24393,7 @@
       </p:sp>
       <p:sp>
         <p:nvSpPr>
-          <p:cNvPr id="19" name="Rectangle 18"/>
+          <p:cNvPr id="20" name="Rectangle 19"/>
           <p:cNvSpPr/>
           <p:nvPr/>
         </p:nvSpPr>
@@ -22931,7 +24442,7 @@
       </p:sp>
       <p:sp>
         <p:nvSpPr>
-          <p:cNvPr id="20" name="TextBox 19"/>
+          <p:cNvPr id="21" name="TextBox 20"/>
           <p:cNvSpPr txBox="1"/>
           <p:nvPr/>
         </p:nvSpPr>
@@ -22973,7 +24484,7 @@
       </p:sp>
       <p:sp>
         <p:nvSpPr>
-          <p:cNvPr id="21" name="TextBox 20"/>
+          <p:cNvPr id="22" name="TextBox 21"/>
           <p:cNvSpPr txBox="1"/>
           <p:nvPr/>
         </p:nvSpPr>
@@ -23008,14 +24519,14 @@
               <a:rPr>
                 <a:latin typeface="Inter"/>
               </a:rPr>
-              <a:t>Confidential — prepared for internal investment use · Data as of 2026-06-30</a:t>
-            </a:r>
-          </a:p>
-        </p:txBody>
-      </p:sp>
-      <p:sp>
-        <p:nvSpPr>
-          <p:cNvPr id="22" name="TextBox 21"/>
+              <a:t>Confidential — Investment Committee · Data as of 2026-06-30</a:t>
+            </a:r>
+          </a:p>
+        </p:txBody>
+      </p:sp>
+      <p:sp>
+        <p:nvSpPr>
+          <p:cNvPr id="23" name="TextBox 22"/>
           <p:cNvSpPr txBox="1"/>
           <p:nvPr/>
         </p:nvSpPr>
@@ -23131,7 +24642,7 @@
         <p:spPr>
           <a:xfrm>
             <a:off x="640080" y="329184"/>
-            <a:ext cx="9875520" cy="182880"/>
+            <a:ext cx="5303520" cy="182880"/>
           </a:xfrm>
           <a:prstGeom prst="rect">
             <a:avLst/>
@@ -23172,6 +24683,48 @@
         </p:nvSpPr>
         <p:spPr>
           <a:xfrm>
+            <a:off x="5897880" y="310896"/>
+            <a:ext cx="4800600" cy="256032"/>
+          </a:xfrm>
+          <a:prstGeom prst="rect">
+            <a:avLst/>
+          </a:prstGeom>
+          <a:noFill/>
+        </p:spPr>
+        <p:txBody>
+          <a:bodyPr wrap="none" lIns="9144" rIns="9144" tIns="9144" bIns="9144" anchor="t">
+            <a:spAutoFit/>
+          </a:bodyPr>
+          <a:lstStyle/>
+          <a:p>
+            <a:pPr algn="r">
+              <a:spcAft>
+                <a:spcPts val="0"/>
+              </a:spcAft>
+              <a:defRPr sz="680" b="1">
+                <a:solidFill>
+                  <a:srgbClr val="4F6B00"/>
+                </a:solidFill>
+                <a:latin typeface="Inter"/>
+              </a:defRPr>
+            </a:pPr>
+            <a:r>
+              <a:rPr>
+                <a:latin typeface="Inter"/>
+              </a:rPr>
+              <a:t>Illustrative, Gradient Maintained — demo data, not the client's holdings or managers</a:t>
+            </a:r>
+          </a:p>
+        </p:txBody>
+      </p:sp>
+      <p:sp>
+        <p:nvSpPr>
+          <p:cNvPr id="5" name="TextBox 4"/>
+          <p:cNvSpPr txBox="1"/>
+          <p:nvPr/>
+        </p:nvSpPr>
+        <p:spPr>
+          <a:xfrm>
             <a:off x="640080" y="566928"/>
             <a:ext cx="10058400" cy="530352"/>
           </a:xfrm>
@@ -23208,7 +24761,7 @@
       </p:sp>
       <p:sp>
         <p:nvSpPr>
-          <p:cNvPr id="5" name="Rectangle 4"/>
+          <p:cNvPr id="6" name="Rectangle 5"/>
           <p:cNvSpPr/>
           <p:nvPr/>
         </p:nvSpPr>
@@ -23257,7 +24810,7 @@
       </p:sp>
       <p:sp>
         <p:nvSpPr>
-          <p:cNvPr id="6" name="Rectangle 5"/>
+          <p:cNvPr id="7" name="Rectangle 6"/>
           <p:cNvSpPr/>
           <p:nvPr/>
         </p:nvSpPr>
@@ -23306,7 +24859,7 @@
       </p:sp>
       <p:sp>
         <p:nvSpPr>
-          <p:cNvPr id="7" name="TextBox 6"/>
+          <p:cNvPr id="8" name="TextBox 7"/>
           <p:cNvSpPr txBox="1"/>
           <p:nvPr/>
         </p:nvSpPr>
@@ -23348,7 +24901,7 @@
       </p:sp>
       <p:sp>
         <p:nvSpPr>
-          <p:cNvPr id="8" name="TextBox 7"/>
+          <p:cNvPr id="9" name="TextBox 8"/>
           <p:cNvSpPr txBox="1"/>
           <p:nvPr/>
         </p:nvSpPr>
@@ -23390,7 +24943,7 @@
       </p:sp>
       <p:graphicFrame>
         <p:nvGraphicFramePr>
-          <p:cNvPr id="9" name="Chart 8"/>
+          <p:cNvPr id="10" name="Chart 9"/>
           <p:cNvGraphicFramePr>
             <a:graphicFrameLocks noGrp="1"/>
           </p:cNvGraphicFramePr>
@@ -23408,7 +24961,7 @@
       </p:graphicFrame>
       <p:sp>
         <p:nvSpPr>
-          <p:cNvPr id="10" name="Rectangle 9"/>
+          <p:cNvPr id="11" name="Rectangle 10"/>
           <p:cNvSpPr/>
           <p:nvPr/>
         </p:nvSpPr>
@@ -23457,7 +25010,7 @@
       </p:sp>
       <p:sp>
         <p:nvSpPr>
-          <p:cNvPr id="11" name="TextBox 10"/>
+          <p:cNvPr id="12" name="TextBox 11"/>
           <p:cNvSpPr txBox="1"/>
           <p:nvPr/>
         </p:nvSpPr>
@@ -23499,7 +25052,7 @@
       </p:sp>
       <p:sp>
         <p:nvSpPr>
-          <p:cNvPr id="12" name="TextBox 11"/>
+          <p:cNvPr id="13" name="TextBox 12"/>
           <p:cNvSpPr txBox="1"/>
           <p:nvPr/>
         </p:nvSpPr>
@@ -23534,14 +25087,14 @@
               <a:rPr>
                 <a:latin typeface="Inter"/>
               </a:rPr>
-              <a:t>Confidential — prepared for internal investment use · Data as of 2026-06-30</a:t>
-            </a:r>
-          </a:p>
-        </p:txBody>
-      </p:sp>
-      <p:sp>
-        <p:nvSpPr>
-          <p:cNvPr id="13" name="TextBox 12"/>
+              <a:t>Confidential — Investment Committee · Data as of 2026-06-30</a:t>
+            </a:r>
+          </a:p>
+        </p:txBody>
+      </p:sp>
+      <p:sp>
+        <p:nvSpPr>
+          <p:cNvPr id="14" name="TextBox 13"/>
           <p:cNvSpPr txBox="1"/>
           <p:nvPr/>
         </p:nvSpPr>
@@ -23657,7 +25210,7 @@
         <p:spPr>
           <a:xfrm>
             <a:off x="640080" y="329184"/>
-            <a:ext cx="9875520" cy="182880"/>
+            <a:ext cx="5303520" cy="182880"/>
           </a:xfrm>
           <a:prstGeom prst="rect">
             <a:avLst/>
@@ -23698,6 +25251,48 @@
         </p:nvSpPr>
         <p:spPr>
           <a:xfrm>
+            <a:off x="5897880" y="310896"/>
+            <a:ext cx="4800600" cy="256032"/>
+          </a:xfrm>
+          <a:prstGeom prst="rect">
+            <a:avLst/>
+          </a:prstGeom>
+          <a:noFill/>
+        </p:spPr>
+        <p:txBody>
+          <a:bodyPr wrap="none" lIns="9144" rIns="9144" tIns="9144" bIns="9144" anchor="t">
+            <a:spAutoFit/>
+          </a:bodyPr>
+          <a:lstStyle/>
+          <a:p>
+            <a:pPr algn="r">
+              <a:spcAft>
+                <a:spcPts val="0"/>
+              </a:spcAft>
+              <a:defRPr sz="680" b="1">
+                <a:solidFill>
+                  <a:srgbClr val="4F6B00"/>
+                </a:solidFill>
+                <a:latin typeface="Inter"/>
+              </a:defRPr>
+            </a:pPr>
+            <a:r>
+              <a:rPr>
+                <a:latin typeface="Inter"/>
+              </a:rPr>
+              <a:t>Illustrative, Gradient Maintained — demo data, not the client's holdings or managers</a:t>
+            </a:r>
+          </a:p>
+        </p:txBody>
+      </p:sp>
+      <p:sp>
+        <p:nvSpPr>
+          <p:cNvPr id="5" name="TextBox 4"/>
+          <p:cNvSpPr txBox="1"/>
+          <p:nvPr/>
+        </p:nvSpPr>
+        <p:spPr>
+          <a:xfrm>
             <a:off x="640080" y="566928"/>
             <a:ext cx="10058400" cy="530352"/>
           </a:xfrm>
@@ -23734,7 +25329,7 @@
       </p:sp>
       <p:sp>
         <p:nvSpPr>
-          <p:cNvPr id="5" name="Rectangle 4"/>
+          <p:cNvPr id="6" name="Rectangle 5"/>
           <p:cNvSpPr/>
           <p:nvPr/>
         </p:nvSpPr>
@@ -23783,7 +25378,7 @@
       </p:sp>
       <p:sp>
         <p:nvSpPr>
-          <p:cNvPr id="6" name="Rectangle 5"/>
+          <p:cNvPr id="7" name="Rectangle 6"/>
           <p:cNvSpPr/>
           <p:nvPr/>
         </p:nvSpPr>
@@ -23832,7 +25427,7 @@
       </p:sp>
       <p:sp>
         <p:nvSpPr>
-          <p:cNvPr id="7" name="TextBox 6"/>
+          <p:cNvPr id="8" name="TextBox 7"/>
           <p:cNvSpPr txBox="1"/>
           <p:nvPr/>
         </p:nvSpPr>
@@ -23874,7 +25469,7 @@
       </p:sp>
       <p:sp>
         <p:nvSpPr>
-          <p:cNvPr id="8" name="TextBox 7"/>
+          <p:cNvPr id="9" name="TextBox 8"/>
           <p:cNvSpPr txBox="1"/>
           <p:nvPr/>
         </p:nvSpPr>
@@ -23916,7 +25511,7 @@
       </p:sp>
       <p:graphicFrame>
         <p:nvGraphicFramePr>
-          <p:cNvPr id="9" name="Chart 8"/>
+          <p:cNvPr id="10" name="Chart 9"/>
           <p:cNvGraphicFramePr>
             <a:graphicFrameLocks noGrp="1"/>
           </p:cNvGraphicFramePr>
@@ -23934,7 +25529,7 @@
       </p:graphicFrame>
       <p:sp>
         <p:nvSpPr>
-          <p:cNvPr id="10" name="Rectangle 9"/>
+          <p:cNvPr id="11" name="Rectangle 10"/>
           <p:cNvSpPr/>
           <p:nvPr/>
         </p:nvSpPr>
@@ -23983,7 +25578,7 @@
       </p:sp>
       <p:sp>
         <p:nvSpPr>
-          <p:cNvPr id="11" name="TextBox 10"/>
+          <p:cNvPr id="12" name="TextBox 11"/>
           <p:cNvSpPr txBox="1"/>
           <p:nvPr/>
         </p:nvSpPr>
@@ -24025,7 +25620,7 @@
       </p:sp>
       <p:sp>
         <p:nvSpPr>
-          <p:cNvPr id="12" name="TextBox 11"/>
+          <p:cNvPr id="13" name="TextBox 12"/>
           <p:cNvSpPr txBox="1"/>
           <p:nvPr/>
         </p:nvSpPr>
@@ -24060,14 +25655,14 @@
               <a:rPr>
                 <a:latin typeface="Inter"/>
               </a:rPr>
-              <a:t>Confidential — prepared for internal investment use · Data as of 2026-06-30</a:t>
-            </a:r>
-          </a:p>
-        </p:txBody>
-      </p:sp>
-      <p:sp>
-        <p:nvSpPr>
-          <p:cNvPr id="13" name="TextBox 12"/>
+              <a:t>Confidential — Investment Committee · Data as of 2026-06-30</a:t>
+            </a:r>
+          </a:p>
+        </p:txBody>
+      </p:sp>
+      <p:sp>
+        <p:nvSpPr>
+          <p:cNvPr id="14" name="TextBox 13"/>
           <p:cNvSpPr txBox="1"/>
           <p:nvPr/>
         </p:nvSpPr>
@@ -24183,7 +25778,7 @@
         <p:spPr>
           <a:xfrm>
             <a:off x="640080" y="329184"/>
-            <a:ext cx="9875520" cy="182880"/>
+            <a:ext cx="5303520" cy="182880"/>
           </a:xfrm>
           <a:prstGeom prst="rect">
             <a:avLst/>
@@ -24224,6 +25819,48 @@
         </p:nvSpPr>
         <p:spPr>
           <a:xfrm>
+            <a:off x="5897880" y="310896"/>
+            <a:ext cx="4800600" cy="256032"/>
+          </a:xfrm>
+          <a:prstGeom prst="rect">
+            <a:avLst/>
+          </a:prstGeom>
+          <a:noFill/>
+        </p:spPr>
+        <p:txBody>
+          <a:bodyPr wrap="none" lIns="9144" rIns="9144" tIns="9144" bIns="9144" anchor="t">
+            <a:spAutoFit/>
+          </a:bodyPr>
+          <a:lstStyle/>
+          <a:p>
+            <a:pPr algn="r">
+              <a:spcAft>
+                <a:spcPts val="0"/>
+              </a:spcAft>
+              <a:defRPr sz="680" b="1">
+                <a:solidFill>
+                  <a:srgbClr val="4F6B00"/>
+                </a:solidFill>
+                <a:latin typeface="Inter"/>
+              </a:defRPr>
+            </a:pPr>
+            <a:r>
+              <a:rPr>
+                <a:latin typeface="Inter"/>
+              </a:rPr>
+              <a:t>Illustrative, Gradient Maintained — demo data, not the client's holdings or managers</a:t>
+            </a:r>
+          </a:p>
+        </p:txBody>
+      </p:sp>
+      <p:sp>
+        <p:nvSpPr>
+          <p:cNvPr id="5" name="TextBox 4"/>
+          <p:cNvSpPr txBox="1"/>
+          <p:nvPr/>
+        </p:nvSpPr>
+        <p:spPr>
+          <a:xfrm>
             <a:off x="640080" y="566928"/>
             <a:ext cx="10058400" cy="530352"/>
           </a:xfrm>
@@ -24260,7 +25897,7 @@
       </p:sp>
       <p:sp>
         <p:nvSpPr>
-          <p:cNvPr id="5" name="Rectangle 4"/>
+          <p:cNvPr id="6" name="Rectangle 5"/>
           <p:cNvSpPr/>
           <p:nvPr/>
         </p:nvSpPr>
@@ -24309,7 +25946,7 @@
       </p:sp>
       <p:sp>
         <p:nvSpPr>
-          <p:cNvPr id="6" name="Rectangle 5"/>
+          <p:cNvPr id="7" name="Rectangle 6"/>
           <p:cNvSpPr/>
           <p:nvPr/>
         </p:nvSpPr>
@@ -24358,7 +25995,7 @@
       </p:sp>
       <p:sp>
         <p:nvSpPr>
-          <p:cNvPr id="7" name="TextBox 6"/>
+          <p:cNvPr id="8" name="TextBox 7"/>
           <p:cNvSpPr txBox="1"/>
           <p:nvPr/>
         </p:nvSpPr>
@@ -24400,7 +26037,7 @@
       </p:sp>
       <p:sp>
         <p:nvSpPr>
-          <p:cNvPr id="8" name="Rectangle 7"/>
+          <p:cNvPr id="9" name="Rectangle 8"/>
           <p:cNvSpPr/>
           <p:nvPr/>
         </p:nvSpPr>
@@ -24449,7 +26086,7 @@
       </p:sp>
       <p:sp>
         <p:nvSpPr>
-          <p:cNvPr id="9" name="Rectangle 8"/>
+          <p:cNvPr id="10" name="Rectangle 9"/>
           <p:cNvSpPr/>
           <p:nvPr/>
         </p:nvSpPr>
@@ -24498,7 +26135,7 @@
       </p:sp>
       <p:sp>
         <p:nvSpPr>
-          <p:cNvPr id="10" name="TextBox 9"/>
+          <p:cNvPr id="11" name="TextBox 10"/>
           <p:cNvSpPr txBox="1"/>
           <p:nvPr/>
         </p:nvSpPr>
@@ -24540,7 +26177,7 @@
       </p:sp>
       <p:sp>
         <p:nvSpPr>
-          <p:cNvPr id="11" name="TextBox 10"/>
+          <p:cNvPr id="12" name="TextBox 11"/>
           <p:cNvSpPr txBox="1"/>
           <p:nvPr/>
         </p:nvSpPr>
@@ -24582,7 +26219,7 @@
       </p:sp>
       <p:sp>
         <p:nvSpPr>
-          <p:cNvPr id="12" name="Rectangle 11"/>
+          <p:cNvPr id="13" name="Rectangle 12"/>
           <p:cNvSpPr/>
           <p:nvPr/>
         </p:nvSpPr>
@@ -24631,7 +26268,7 @@
       </p:sp>
       <p:sp>
         <p:nvSpPr>
-          <p:cNvPr id="13" name="Rectangle 12"/>
+          <p:cNvPr id="14" name="Rectangle 13"/>
           <p:cNvSpPr/>
           <p:nvPr/>
         </p:nvSpPr>
@@ -24680,7 +26317,7 @@
       </p:sp>
       <p:sp>
         <p:nvSpPr>
-          <p:cNvPr id="14" name="TextBox 13"/>
+          <p:cNvPr id="15" name="TextBox 14"/>
           <p:cNvSpPr txBox="1"/>
           <p:nvPr/>
         </p:nvSpPr>
@@ -24722,7 +26359,7 @@
       </p:sp>
       <p:sp>
         <p:nvSpPr>
-          <p:cNvPr id="15" name="TextBox 14"/>
+          <p:cNvPr id="16" name="TextBox 15"/>
           <p:cNvSpPr txBox="1"/>
           <p:nvPr/>
         </p:nvSpPr>
@@ -24764,7 +26401,7 @@
       </p:sp>
       <p:sp>
         <p:nvSpPr>
-          <p:cNvPr id="16" name="Rectangle 15"/>
+          <p:cNvPr id="17" name="Rectangle 16"/>
           <p:cNvSpPr/>
           <p:nvPr/>
         </p:nvSpPr>
@@ -24813,7 +26450,7 @@
       </p:sp>
       <p:sp>
         <p:nvSpPr>
-          <p:cNvPr id="17" name="Rectangle 16"/>
+          <p:cNvPr id="18" name="Rectangle 17"/>
           <p:cNvSpPr/>
           <p:nvPr/>
         </p:nvSpPr>
@@ -24862,7 +26499,7 @@
       </p:sp>
       <p:sp>
         <p:nvSpPr>
-          <p:cNvPr id="18" name="TextBox 17"/>
+          <p:cNvPr id="19" name="TextBox 18"/>
           <p:cNvSpPr txBox="1"/>
           <p:nvPr/>
         </p:nvSpPr>
@@ -24904,7 +26541,7 @@
       </p:sp>
       <p:sp>
         <p:nvSpPr>
-          <p:cNvPr id="19" name="TextBox 18"/>
+          <p:cNvPr id="20" name="TextBox 19"/>
           <p:cNvSpPr txBox="1"/>
           <p:nvPr/>
         </p:nvSpPr>
@@ -24946,7 +26583,7 @@
       </p:sp>
       <p:sp>
         <p:nvSpPr>
-          <p:cNvPr id="20" name="Rectangle 19"/>
+          <p:cNvPr id="21" name="Rectangle 20"/>
           <p:cNvSpPr/>
           <p:nvPr/>
         </p:nvSpPr>
@@ -24995,7 +26632,7 @@
       </p:sp>
       <p:sp>
         <p:nvSpPr>
-          <p:cNvPr id="21" name="TextBox 20"/>
+          <p:cNvPr id="22" name="TextBox 21"/>
           <p:cNvSpPr txBox="1"/>
           <p:nvPr/>
         </p:nvSpPr>
@@ -25037,7 +26674,7 @@
       </p:sp>
       <p:sp>
         <p:nvSpPr>
-          <p:cNvPr id="22" name="TextBox 21"/>
+          <p:cNvPr id="23" name="TextBox 22"/>
           <p:cNvSpPr txBox="1"/>
           <p:nvPr/>
         </p:nvSpPr>
@@ -25072,14 +26709,14 @@
               <a:rPr>
                 <a:latin typeface="Inter"/>
               </a:rPr>
-              <a:t>Confidential — prepared for internal investment use · Data as of 2026-06-30</a:t>
-            </a:r>
-          </a:p>
-        </p:txBody>
-      </p:sp>
-      <p:sp>
-        <p:nvSpPr>
-          <p:cNvPr id="23" name="TextBox 22"/>
+              <a:t>Confidential — Investment Committee · Data as of 2026-06-30</a:t>
+            </a:r>
+          </a:p>
+        </p:txBody>
+      </p:sp>
+      <p:sp>
+        <p:nvSpPr>
+          <p:cNvPr id="24" name="TextBox 23"/>
           <p:cNvSpPr txBox="1"/>
           <p:nvPr/>
         </p:nvSpPr>
@@ -25195,7 +26832,7 @@
         <p:spPr>
           <a:xfrm>
             <a:off x="640080" y="329184"/>
-            <a:ext cx="9875520" cy="182880"/>
+            <a:ext cx="5303520" cy="182880"/>
           </a:xfrm>
           <a:prstGeom prst="rect">
             <a:avLst/>
@@ -25236,6 +26873,48 @@
         </p:nvSpPr>
         <p:spPr>
           <a:xfrm>
+            <a:off x="5897880" y="310896"/>
+            <a:ext cx="4800600" cy="256032"/>
+          </a:xfrm>
+          <a:prstGeom prst="rect">
+            <a:avLst/>
+          </a:prstGeom>
+          <a:noFill/>
+        </p:spPr>
+        <p:txBody>
+          <a:bodyPr wrap="none" lIns="9144" rIns="9144" tIns="9144" bIns="9144" anchor="t">
+            <a:spAutoFit/>
+          </a:bodyPr>
+          <a:lstStyle/>
+          <a:p>
+            <a:pPr algn="r">
+              <a:spcAft>
+                <a:spcPts val="0"/>
+              </a:spcAft>
+              <a:defRPr sz="680" b="1">
+                <a:solidFill>
+                  <a:srgbClr val="4F6B00"/>
+                </a:solidFill>
+                <a:latin typeface="Inter"/>
+              </a:defRPr>
+            </a:pPr>
+            <a:r>
+              <a:rPr>
+                <a:latin typeface="Inter"/>
+              </a:rPr>
+              <a:t>Illustrative, Gradient Maintained — demo data, not the client's holdings or managers</a:t>
+            </a:r>
+          </a:p>
+        </p:txBody>
+      </p:sp>
+      <p:sp>
+        <p:nvSpPr>
+          <p:cNvPr id="5" name="TextBox 4"/>
+          <p:cNvSpPr txBox="1"/>
+          <p:nvPr/>
+        </p:nvSpPr>
+        <p:spPr>
+          <a:xfrm>
             <a:off x="640080" y="566928"/>
             <a:ext cx="10058400" cy="530352"/>
           </a:xfrm>
@@ -25272,7 +26951,7 @@
       </p:sp>
       <p:sp>
         <p:nvSpPr>
-          <p:cNvPr id="5" name="Rectangle 4"/>
+          <p:cNvPr id="6" name="Rectangle 5"/>
           <p:cNvSpPr/>
           <p:nvPr/>
         </p:nvSpPr>
@@ -25321,7 +27000,7 @@
       </p:sp>
       <p:sp>
         <p:nvSpPr>
-          <p:cNvPr id="6" name="Rectangle 5"/>
+          <p:cNvPr id="7" name="Rectangle 6"/>
           <p:cNvSpPr/>
           <p:nvPr/>
         </p:nvSpPr>
@@ -25370,7 +27049,7 @@
       </p:sp>
       <p:sp>
         <p:nvSpPr>
-          <p:cNvPr id="7" name="TextBox 6"/>
+          <p:cNvPr id="8" name="TextBox 7"/>
           <p:cNvSpPr txBox="1"/>
           <p:nvPr/>
         </p:nvSpPr>
@@ -25412,7 +27091,7 @@
       </p:sp>
       <p:sp>
         <p:nvSpPr>
-          <p:cNvPr id="8" name="Rectangle 7"/>
+          <p:cNvPr id="9" name="Rectangle 8"/>
           <p:cNvSpPr/>
           <p:nvPr/>
         </p:nvSpPr>
@@ -25461,7 +27140,7 @@
       </p:sp>
       <p:sp>
         <p:nvSpPr>
-          <p:cNvPr id="9" name="TextBox 8"/>
+          <p:cNvPr id="10" name="TextBox 9"/>
           <p:cNvSpPr txBox="1"/>
           <p:nvPr/>
         </p:nvSpPr>
@@ -25503,7 +27182,7 @@
       </p:sp>
       <p:sp>
         <p:nvSpPr>
-          <p:cNvPr id="10" name="TextBox 9"/>
+          <p:cNvPr id="11" name="TextBox 10"/>
           <p:cNvSpPr txBox="1"/>
           <p:nvPr/>
         </p:nvSpPr>
@@ -25545,7 +27224,7 @@
       </p:sp>
       <p:graphicFrame>
         <p:nvGraphicFramePr>
-          <p:cNvPr id="11" name="Table 10"/>
+          <p:cNvPr id="12" name="Table 11"/>
           <p:cNvGraphicFramePr>
             <a:graphicFrameLocks noGrp="1"/>
           </p:cNvGraphicFramePr>
@@ -25738,7 +27417,7 @@
       </p:graphicFrame>
       <p:sp>
         <p:nvSpPr>
-          <p:cNvPr id="12" name="Rectangle 11"/>
+          <p:cNvPr id="13" name="Rectangle 12"/>
           <p:cNvSpPr/>
           <p:nvPr/>
         </p:nvSpPr>
@@ -25787,7 +27466,7 @@
       </p:sp>
       <p:sp>
         <p:nvSpPr>
-          <p:cNvPr id="13" name="TextBox 12"/>
+          <p:cNvPr id="14" name="TextBox 13"/>
           <p:cNvSpPr txBox="1"/>
           <p:nvPr/>
         </p:nvSpPr>
@@ -25829,7 +27508,7 @@
       </p:sp>
       <p:sp>
         <p:nvSpPr>
-          <p:cNvPr id="14" name="TextBox 13"/>
+          <p:cNvPr id="15" name="TextBox 14"/>
           <p:cNvSpPr txBox="1"/>
           <p:nvPr/>
         </p:nvSpPr>
@@ -25864,14 +27543,14 @@
               <a:rPr>
                 <a:latin typeface="Inter"/>
               </a:rPr>
-              <a:t>Confidential — prepared for internal investment use · Data as of 2026-06-30</a:t>
-            </a:r>
-          </a:p>
-        </p:txBody>
-      </p:sp>
-      <p:sp>
-        <p:nvSpPr>
-          <p:cNvPr id="15" name="TextBox 14"/>
+              <a:t>Confidential — Investment Committee · Data as of 2026-06-30</a:t>
+            </a:r>
+          </a:p>
+        </p:txBody>
+      </p:sp>
+      <p:sp>
+        <p:nvSpPr>
+          <p:cNvPr id="16" name="TextBox 15"/>
           <p:cNvSpPr txBox="1"/>
           <p:nvPr/>
         </p:nvSpPr>
@@ -25987,7 +27666,7 @@
         <p:spPr>
           <a:xfrm>
             <a:off x="640080" y="329184"/>
-            <a:ext cx="9875520" cy="182880"/>
+            <a:ext cx="5303520" cy="182880"/>
           </a:xfrm>
           <a:prstGeom prst="rect">
             <a:avLst/>
@@ -26028,6 +27707,48 @@
         </p:nvSpPr>
         <p:spPr>
           <a:xfrm>
+            <a:off x="5897880" y="310896"/>
+            <a:ext cx="4800600" cy="256032"/>
+          </a:xfrm>
+          <a:prstGeom prst="rect">
+            <a:avLst/>
+          </a:prstGeom>
+          <a:noFill/>
+        </p:spPr>
+        <p:txBody>
+          <a:bodyPr wrap="none" lIns="9144" rIns="9144" tIns="9144" bIns="9144" anchor="t">
+            <a:spAutoFit/>
+          </a:bodyPr>
+          <a:lstStyle/>
+          <a:p>
+            <a:pPr algn="r">
+              <a:spcAft>
+                <a:spcPts val="0"/>
+              </a:spcAft>
+              <a:defRPr sz="680" b="1">
+                <a:solidFill>
+                  <a:srgbClr val="4F6B00"/>
+                </a:solidFill>
+                <a:latin typeface="Inter"/>
+              </a:defRPr>
+            </a:pPr>
+            <a:r>
+              <a:rPr>
+                <a:latin typeface="Inter"/>
+              </a:rPr>
+              <a:t>Illustrative, Gradient Maintained — demo data, not the client's holdings or managers</a:t>
+            </a:r>
+          </a:p>
+        </p:txBody>
+      </p:sp>
+      <p:sp>
+        <p:nvSpPr>
+          <p:cNvPr id="5" name="TextBox 4"/>
+          <p:cNvSpPr txBox="1"/>
+          <p:nvPr/>
+        </p:nvSpPr>
+        <p:spPr>
+          <a:xfrm>
             <a:off x="640080" y="566928"/>
             <a:ext cx="10058400" cy="530352"/>
           </a:xfrm>
@@ -26064,7 +27785,7 @@
       </p:sp>
       <p:sp>
         <p:nvSpPr>
-          <p:cNvPr id="5" name="Rectangle 4"/>
+          <p:cNvPr id="6" name="Rectangle 5"/>
           <p:cNvSpPr/>
           <p:nvPr/>
         </p:nvSpPr>
@@ -26113,7 +27834,7 @@
       </p:sp>
       <p:sp>
         <p:nvSpPr>
-          <p:cNvPr id="6" name="Rectangle 5"/>
+          <p:cNvPr id="7" name="Rectangle 6"/>
           <p:cNvSpPr/>
           <p:nvPr/>
         </p:nvSpPr>
@@ -26162,7 +27883,7 @@
       </p:sp>
       <p:sp>
         <p:nvSpPr>
-          <p:cNvPr id="7" name="TextBox 6"/>
+          <p:cNvPr id="8" name="TextBox 7"/>
           <p:cNvSpPr txBox="1"/>
           <p:nvPr/>
         </p:nvSpPr>
@@ -26204,7 +27925,7 @@
       </p:sp>
       <p:sp>
         <p:nvSpPr>
-          <p:cNvPr id="8" name="TextBox 7"/>
+          <p:cNvPr id="9" name="TextBox 8"/>
           <p:cNvSpPr txBox="1"/>
           <p:nvPr/>
         </p:nvSpPr>
@@ -26246,7 +27967,7 @@
       </p:sp>
       <p:graphicFrame>
         <p:nvGraphicFramePr>
-          <p:cNvPr id="9" name="Chart 8"/>
+          <p:cNvPr id="10" name="Chart 9"/>
           <p:cNvGraphicFramePr>
             <a:graphicFrameLocks noGrp="1"/>
           </p:cNvGraphicFramePr>
@@ -26264,7 +27985,7 @@
       </p:graphicFrame>
       <p:sp>
         <p:nvSpPr>
-          <p:cNvPr id="10" name="Rectangle 9"/>
+          <p:cNvPr id="11" name="Rectangle 10"/>
           <p:cNvSpPr/>
           <p:nvPr/>
         </p:nvSpPr>
@@ -26313,7 +28034,7 @@
       </p:sp>
       <p:sp>
         <p:nvSpPr>
-          <p:cNvPr id="11" name="TextBox 10"/>
+          <p:cNvPr id="12" name="TextBox 11"/>
           <p:cNvSpPr txBox="1"/>
           <p:nvPr/>
         </p:nvSpPr>
@@ -26355,7 +28076,7 @@
       </p:sp>
       <p:sp>
         <p:nvSpPr>
-          <p:cNvPr id="12" name="TextBox 11"/>
+          <p:cNvPr id="13" name="TextBox 12"/>
           <p:cNvSpPr txBox="1"/>
           <p:nvPr/>
         </p:nvSpPr>
@@ -26390,14 +28111,14 @@
               <a:rPr>
                 <a:latin typeface="Inter"/>
               </a:rPr>
-              <a:t>Confidential — prepared for internal investment use · Data as of 2026-06-30</a:t>
-            </a:r>
-          </a:p>
-        </p:txBody>
-      </p:sp>
-      <p:sp>
-        <p:nvSpPr>
-          <p:cNvPr id="13" name="TextBox 12"/>
+              <a:t>Confidential — Investment Committee · Data as of 2026-06-30</a:t>
+            </a:r>
+          </a:p>
+        </p:txBody>
+      </p:sp>
+      <p:sp>
+        <p:nvSpPr>
+          <p:cNvPr id="14" name="TextBox 13"/>
           <p:cNvSpPr txBox="1"/>
           <p:nvPr/>
         </p:nvSpPr>
@@ -26513,7 +28234,7 @@
         <p:spPr>
           <a:xfrm>
             <a:off x="640080" y="329184"/>
-            <a:ext cx="9875520" cy="182880"/>
+            <a:ext cx="5303520" cy="182880"/>
           </a:xfrm>
           <a:prstGeom prst="rect">
             <a:avLst/>
@@ -26554,6 +28275,48 @@
         </p:nvSpPr>
         <p:spPr>
           <a:xfrm>
+            <a:off x="5897880" y="310896"/>
+            <a:ext cx="4800600" cy="256032"/>
+          </a:xfrm>
+          <a:prstGeom prst="rect">
+            <a:avLst/>
+          </a:prstGeom>
+          <a:noFill/>
+        </p:spPr>
+        <p:txBody>
+          <a:bodyPr wrap="none" lIns="9144" rIns="9144" tIns="9144" bIns="9144" anchor="t">
+            <a:spAutoFit/>
+          </a:bodyPr>
+          <a:lstStyle/>
+          <a:p>
+            <a:pPr algn="r">
+              <a:spcAft>
+                <a:spcPts val="0"/>
+              </a:spcAft>
+              <a:defRPr sz="680" b="1">
+                <a:solidFill>
+                  <a:srgbClr val="4F6B00"/>
+                </a:solidFill>
+                <a:latin typeface="Inter"/>
+              </a:defRPr>
+            </a:pPr>
+            <a:r>
+              <a:rPr>
+                <a:latin typeface="Inter"/>
+              </a:rPr>
+              <a:t>Illustrative, Gradient Maintained — demo data, not the client's holdings or managers</a:t>
+            </a:r>
+          </a:p>
+        </p:txBody>
+      </p:sp>
+      <p:sp>
+        <p:nvSpPr>
+          <p:cNvPr id="5" name="TextBox 4"/>
+          <p:cNvSpPr txBox="1"/>
+          <p:nvPr/>
+        </p:nvSpPr>
+        <p:spPr>
+          <a:xfrm>
             <a:off x="640080" y="566928"/>
             <a:ext cx="10058400" cy="530352"/>
           </a:xfrm>
@@ -26590,7 +28353,7 @@
       </p:sp>
       <p:sp>
         <p:nvSpPr>
-          <p:cNvPr id="5" name="Rectangle 4"/>
+          <p:cNvPr id="6" name="Rectangle 5"/>
           <p:cNvSpPr/>
           <p:nvPr/>
         </p:nvSpPr>
@@ -26639,7 +28402,7 @@
       </p:sp>
       <p:sp>
         <p:nvSpPr>
-          <p:cNvPr id="6" name="Rectangle 5"/>
+          <p:cNvPr id="7" name="Rectangle 6"/>
           <p:cNvSpPr/>
           <p:nvPr/>
         </p:nvSpPr>
@@ -26688,7 +28451,7 @@
       </p:sp>
       <p:sp>
         <p:nvSpPr>
-          <p:cNvPr id="7" name="TextBox 6"/>
+          <p:cNvPr id="8" name="TextBox 7"/>
           <p:cNvSpPr txBox="1"/>
           <p:nvPr/>
         </p:nvSpPr>
@@ -26730,7 +28493,7 @@
       </p:sp>
       <p:sp>
         <p:nvSpPr>
-          <p:cNvPr id="8" name="TextBox 7"/>
+          <p:cNvPr id="9" name="TextBox 8"/>
           <p:cNvSpPr txBox="1"/>
           <p:nvPr/>
         </p:nvSpPr>
@@ -26772,7 +28535,7 @@
       </p:sp>
       <p:graphicFrame>
         <p:nvGraphicFramePr>
-          <p:cNvPr id="9" name="Chart 8"/>
+          <p:cNvPr id="10" name="Chart 9"/>
           <p:cNvGraphicFramePr>
             <a:graphicFrameLocks noGrp="1"/>
           </p:cNvGraphicFramePr>
@@ -26790,7 +28553,7 @@
       </p:graphicFrame>
       <p:sp>
         <p:nvSpPr>
-          <p:cNvPr id="10" name="Rectangle 9"/>
+          <p:cNvPr id="11" name="Rectangle 10"/>
           <p:cNvSpPr/>
           <p:nvPr/>
         </p:nvSpPr>
@@ -26839,7 +28602,7 @@
       </p:sp>
       <p:sp>
         <p:nvSpPr>
-          <p:cNvPr id="11" name="TextBox 10"/>
+          <p:cNvPr id="12" name="TextBox 11"/>
           <p:cNvSpPr txBox="1"/>
           <p:nvPr/>
         </p:nvSpPr>
@@ -26881,7 +28644,7 @@
       </p:sp>
       <p:sp>
         <p:nvSpPr>
-          <p:cNvPr id="12" name="TextBox 11"/>
+          <p:cNvPr id="13" name="TextBox 12"/>
           <p:cNvSpPr txBox="1"/>
           <p:nvPr/>
         </p:nvSpPr>
@@ -26916,14 +28679,14 @@
               <a:rPr>
                 <a:latin typeface="Inter"/>
               </a:rPr>
-              <a:t>Confidential — prepared for internal investment use · Data as of 2026-06-30</a:t>
-            </a:r>
-          </a:p>
-        </p:txBody>
-      </p:sp>
-      <p:sp>
-        <p:nvSpPr>
-          <p:cNvPr id="13" name="TextBox 12"/>
+              <a:t>Confidential — Investment Committee · Data as of 2026-06-30</a:t>
+            </a:r>
+          </a:p>
+        </p:txBody>
+      </p:sp>
+      <p:sp>
+        <p:nvSpPr>
+          <p:cNvPr id="14" name="TextBox 13"/>
           <p:cNvSpPr txBox="1"/>
           <p:nvPr/>
         </p:nvSpPr>
@@ -27039,7 +28802,7 @@
         <p:spPr>
           <a:xfrm>
             <a:off x="640080" y="329184"/>
-            <a:ext cx="9875520" cy="182880"/>
+            <a:ext cx="5303520" cy="182880"/>
           </a:xfrm>
           <a:prstGeom prst="rect">
             <a:avLst/>
@@ -27080,6 +28843,48 @@
         </p:nvSpPr>
         <p:spPr>
           <a:xfrm>
+            <a:off x="5897880" y="310896"/>
+            <a:ext cx="4800600" cy="256032"/>
+          </a:xfrm>
+          <a:prstGeom prst="rect">
+            <a:avLst/>
+          </a:prstGeom>
+          <a:noFill/>
+        </p:spPr>
+        <p:txBody>
+          <a:bodyPr wrap="none" lIns="9144" rIns="9144" tIns="9144" bIns="9144" anchor="t">
+            <a:spAutoFit/>
+          </a:bodyPr>
+          <a:lstStyle/>
+          <a:p>
+            <a:pPr algn="r">
+              <a:spcAft>
+                <a:spcPts val="0"/>
+              </a:spcAft>
+              <a:defRPr sz="680" b="1">
+                <a:solidFill>
+                  <a:srgbClr val="4F6B00"/>
+                </a:solidFill>
+                <a:latin typeface="Inter"/>
+              </a:defRPr>
+            </a:pPr>
+            <a:r>
+              <a:rPr>
+                <a:latin typeface="Inter"/>
+              </a:rPr>
+              <a:t>Illustrative, Gradient Maintained — demo data, not the client's holdings or managers</a:t>
+            </a:r>
+          </a:p>
+        </p:txBody>
+      </p:sp>
+      <p:sp>
+        <p:nvSpPr>
+          <p:cNvPr id="5" name="TextBox 4"/>
+          <p:cNvSpPr txBox="1"/>
+          <p:nvPr/>
+        </p:nvSpPr>
+        <p:spPr>
+          <a:xfrm>
             <a:off x="640080" y="566928"/>
             <a:ext cx="10058400" cy="530352"/>
           </a:xfrm>
@@ -27116,7 +28921,7 @@
       </p:sp>
       <p:sp>
         <p:nvSpPr>
-          <p:cNvPr id="5" name="Rectangle 4"/>
+          <p:cNvPr id="6" name="Rectangle 5"/>
           <p:cNvSpPr/>
           <p:nvPr/>
         </p:nvSpPr>
@@ -27165,7 +28970,7 @@
       </p:sp>
       <p:sp>
         <p:nvSpPr>
-          <p:cNvPr id="6" name="Rectangle 5"/>
+          <p:cNvPr id="7" name="Rectangle 6"/>
           <p:cNvSpPr/>
           <p:nvPr/>
         </p:nvSpPr>
@@ -27214,7 +29019,7 @@
       </p:sp>
       <p:sp>
         <p:nvSpPr>
-          <p:cNvPr id="7" name="TextBox 6"/>
+          <p:cNvPr id="8" name="TextBox 7"/>
           <p:cNvSpPr txBox="1"/>
           <p:nvPr/>
         </p:nvSpPr>
@@ -27256,7 +29061,7 @@
       </p:sp>
       <p:sp>
         <p:nvSpPr>
-          <p:cNvPr id="8" name="TextBox 7"/>
+          <p:cNvPr id="9" name="TextBox 8"/>
           <p:cNvSpPr txBox="1"/>
           <p:nvPr/>
         </p:nvSpPr>
@@ -27298,7 +29103,7 @@
       </p:sp>
       <p:graphicFrame>
         <p:nvGraphicFramePr>
-          <p:cNvPr id="9" name="Chart 8"/>
+          <p:cNvPr id="10" name="Chart 9"/>
           <p:cNvGraphicFramePr>
             <a:graphicFrameLocks noGrp="1"/>
           </p:cNvGraphicFramePr>
@@ -27316,7 +29121,7 @@
       </p:graphicFrame>
       <p:sp>
         <p:nvSpPr>
-          <p:cNvPr id="10" name="Rectangle 9"/>
+          <p:cNvPr id="11" name="Rectangle 10"/>
           <p:cNvSpPr/>
           <p:nvPr/>
         </p:nvSpPr>
@@ -27365,7 +29170,7 @@
       </p:sp>
       <p:sp>
         <p:nvSpPr>
-          <p:cNvPr id="11" name="TextBox 10"/>
+          <p:cNvPr id="12" name="TextBox 11"/>
           <p:cNvSpPr txBox="1"/>
           <p:nvPr/>
         </p:nvSpPr>
@@ -27407,7 +29212,7 @@
       </p:sp>
       <p:sp>
         <p:nvSpPr>
-          <p:cNvPr id="12" name="TextBox 11"/>
+          <p:cNvPr id="13" name="TextBox 12"/>
           <p:cNvSpPr txBox="1"/>
           <p:nvPr/>
         </p:nvSpPr>
@@ -27442,14 +29247,14 @@
               <a:rPr>
                 <a:latin typeface="Inter"/>
               </a:rPr>
-              <a:t>Confidential — prepared for internal investment use · Data as of 2026-06-30</a:t>
-            </a:r>
-          </a:p>
-        </p:txBody>
-      </p:sp>
-      <p:sp>
-        <p:nvSpPr>
-          <p:cNvPr id="13" name="TextBox 12"/>
+              <a:t>Confidential — Investment Committee · Data as of 2026-06-30</a:t>
+            </a:r>
+          </a:p>
+        </p:txBody>
+      </p:sp>
+      <p:sp>
+        <p:nvSpPr>
+          <p:cNvPr id="14" name="TextBox 13"/>
           <p:cNvSpPr txBox="1"/>
           <p:nvPr/>
         </p:nvSpPr>
